--- a/project_30_iot_anomaly/presentations/project_presentation.pptx
+++ b/project_30_iot_anomaly/presentations/project_presentation.pptx
@@ -13,6 +13,13 @@
     <p:sldId id="261" r:id="rId12"/>
     <p:sldId id="262" r:id="rId13"/>
     <p:sldId id="263" r:id="rId14"/>
+    <p:sldId id="264" r:id="rId15"/>
+    <p:sldId id="265" r:id="rId16"/>
+    <p:sldId id="266" r:id="rId17"/>
+    <p:sldId id="267" r:id="rId18"/>
+    <p:sldId id="268" r:id="rId19"/>
+    <p:sldId id="269" r:id="rId20"/>
+    <p:sldId id="270" r:id="rId21"/>
   </p:sldIdLst>
   <p:sldSz cx="12191695" cy="6858000" type="screen4x3"/>
   <p:notesSz cx="6858000" cy="9144000"/>
@@ -3110,7 +3117,7 @@
             <a:avLst/>
           </a:prstGeom>
           <a:solidFill>
-            <a:srgbClr val="0F172A"/>
+            <a:srgbClr val="070B14"/>
           </a:solidFill>
           <a:ln>
             <a:noFill/>
@@ -3146,8 +3153,8 @@
         </p:nvSpPr>
         <p:spPr>
           <a:xfrm>
-            <a:off x="1097280" y="1645920"/>
-            <a:ext cx="10058400" cy="3474720"/>
+            <a:off x="914400" y="1645920"/>
+            <a:ext cx="10332720" cy="3474720"/>
           </a:xfrm>
           <a:prstGeom prst="rect">
             <a:avLst/>
@@ -3161,44 +3168,2011 @@
           <a:lstStyle/>
           <a:p>
             <a:pPr>
+              <a:defRPr sz="1200" b="1">
+                <a:solidFill>
+                  <a:srgbClr val="06B6D4"/>
+                </a:solidFill>
+              </a:defRPr>
+            </a:pPr>
+            <a:r>
+              <a:t>COLLEGE CAPSTONE ENGINEERING PORTFOLIO • PROJECT 30</a:t>
+            </a:r>
+          </a:p>
+          <a:p>
+            <a:pPr>
+              <a:defRPr sz="3000" b="1">
+                <a:solidFill>
+                  <a:srgbClr val="F8FAFC"/>
+                </a:solidFill>
+              </a:defRPr>
+            </a:pPr>
+            <a:r>
+              <a:t>AI-Based IoT Device Anomaly Detection for Smart Home Security</a:t>
+            </a:r>
+          </a:p>
+          <a:p>
+            <a:pPr>
+              <a:defRPr sz="1600">
+                <a:solidFill>
+                  <a:srgbClr val="EF4444"/>
+                </a:solidFill>
+              </a:defRPr>
+            </a:pPr>
+            <a:r>
+              <a:t>Deep Bottleneck Autoencoder Reconstruction Loss &amp; Zero-Trust Threat Signature Mitigation</a:t>
+            </a:r>
+          </a:p>
+          <a:p>
+            <a:br/>
+            <a:pPr>
+              <a:defRPr sz="1200">
+                <a:solidFill>
+                  <a:srgbClr val="94A3B8"/>
+                </a:solidFill>
+              </a:defRPr>
+            </a:pPr>
+            <a:r>
+              <a:t>Production Architecture: Dual PyTorch Models • 5,500 Network Telemetry Records • SQLite WAL Persistence • Zero-Trust Policy</a:t>
+            </a:r>
+          </a:p>
+        </p:txBody>
+      </p:sp>
+    </p:spTree>
+  </p:cSld>
+  <p:clrMapOvr>
+    <a:masterClrMapping/>
+  </p:clrMapOvr>
+</p:sld>
+</file>
+
+<file path=ppt/slides/slide10.xml><?xml version="1.0" encoding="utf-8"?>
+<p:sld xmlns:a="http://schemas.openxmlformats.org/drawingml/2006/main" xmlns:p="http://schemas.openxmlformats.org/presentationml/2006/main" xmlns:r="http://schemas.openxmlformats.org/officeDocument/2006/relationships">
+  <p:cSld>
+    <p:spTree>
+      <p:nvGrpSpPr>
+        <p:cNvPr id="1" name=""/>
+        <p:cNvGrpSpPr/>
+        <p:nvPr/>
+      </p:nvGrpSpPr>
+      <p:grpSpPr/>
+      <p:sp>
+        <p:nvSpPr>
+          <p:cNvPr id="2" name="Rectangle 1"/>
+          <p:cNvSpPr/>
+          <p:nvPr/>
+        </p:nvSpPr>
+        <p:spPr>
+          <a:xfrm>
+            <a:off x="0" y="0"/>
+            <a:ext cx="12191695" cy="6858000"/>
+          </a:xfrm>
+          <a:prstGeom prst="rect">
+            <a:avLst/>
+          </a:prstGeom>
+          <a:solidFill>
+            <a:srgbClr val="070B14"/>
+          </a:solidFill>
+          <a:ln>
+            <a:noFill/>
+          </a:ln>
+        </p:spPr>
+        <p:style>
+          <a:lnRef idx="1">
+            <a:schemeClr val="accent1"/>
+          </a:lnRef>
+          <a:fillRef idx="3">
+            <a:schemeClr val="accent1"/>
+          </a:fillRef>
+          <a:effectRef idx="2">
+            <a:schemeClr val="accent1"/>
+          </a:effectRef>
+          <a:fontRef idx="minor">
+            <a:schemeClr val="lt1"/>
+          </a:fontRef>
+        </p:style>
+        <p:txBody>
+          <a:bodyPr rtlCol="0" anchor="ctr"/>
+          <a:lstStyle/>
+          <a:p>
+            <a:pPr algn="ctr"/>
+          </a:p>
+        </p:txBody>
+      </p:sp>
+      <p:sp>
+        <p:nvSpPr>
+          <p:cNvPr id="3" name="TextBox 2"/>
+          <p:cNvSpPr txBox="1"/>
+          <p:nvPr/>
+        </p:nvSpPr>
+        <p:spPr>
+          <a:xfrm>
+            <a:off x="731520" y="365760"/>
+            <a:ext cx="10698480" cy="1005840"/>
+          </a:xfrm>
+          <a:prstGeom prst="rect">
+            <a:avLst/>
+          </a:prstGeom>
+          <a:noFill/>
+        </p:spPr>
+        <p:txBody>
+          <a:bodyPr wrap="square" lIns="0" tIns="0" rIns="0" bIns="0">
+            <a:spAutoFit/>
+          </a:bodyPr>
+          <a:lstStyle/>
+          <a:p>
+            <a:pPr>
+              <a:defRPr sz="1000" b="1">
+                <a:solidFill>
+                  <a:srgbClr val="06B6D4"/>
+                </a:solidFill>
+              </a:defRPr>
+            </a:pPr>
+            <a:r>
+              <a:t>PROJECT 30 • IOT TELEMATICS &amp; CYBERSECURITY</a:t>
+            </a:r>
+          </a:p>
+          <a:p>
+            <a:pPr>
+              <a:defRPr sz="2200" b="1">
+                <a:solidFill>
+                  <a:srgbClr val="F8FAFC"/>
+                </a:solidFill>
+              </a:defRPr>
+            </a:pPr>
+            <a:r>
+              <a:t>Volumetric Mitigation: SYN Flood DDoS Protection</a:t>
+            </a:r>
+          </a:p>
+        </p:txBody>
+      </p:sp>
+      <p:pic>
+        <p:nvPicPr>
+          <p:cNvPr id="4" name="Picture 3" descr="06_syn_flood_ddos_mitigation.png"/>
+          <p:cNvPicPr>
+            <a:picLocks noChangeAspect="1"/>
+          </p:cNvPicPr>
+          <p:nvPr/>
+        </p:nvPicPr>
+        <p:blipFill>
+          <a:blip r:embed="rId2"/>
+          <a:stretch>
+            <a:fillRect/>
+          </a:stretch>
+        </p:blipFill>
+        <p:spPr>
+          <a:xfrm>
+            <a:off x="731520" y="1645920"/>
+            <a:ext cx="5669280" cy="4572000"/>
+          </a:xfrm>
+          <a:prstGeom prst="rect">
+            <a:avLst/>
+          </a:prstGeom>
+        </p:spPr>
+      </p:pic>
+      <p:sp>
+        <p:nvSpPr>
+          <p:cNvPr id="5" name="Rounded Rectangle 4"/>
+          <p:cNvSpPr/>
+          <p:nvPr/>
+        </p:nvSpPr>
+        <p:spPr>
+          <a:xfrm>
+            <a:off x="6675120" y="1645920"/>
+            <a:ext cx="4754880" cy="4572000"/>
+          </a:xfrm>
+          <a:prstGeom prst="roundRect">
+            <a:avLst/>
+          </a:prstGeom>
+          <a:solidFill>
+            <a:srgbClr val="0D1424"/>
+          </a:solidFill>
+          <a:ln w="9525">
+            <a:solidFill>
+              <a:srgbClr val="FFFFFF"/>
+            </a:solidFill>
+          </a:ln>
+        </p:spPr>
+        <p:style>
+          <a:lnRef idx="1">
+            <a:schemeClr val="accent1"/>
+          </a:lnRef>
+          <a:fillRef idx="3">
+            <a:schemeClr val="accent1"/>
+          </a:fillRef>
+          <a:effectRef idx="2">
+            <a:schemeClr val="accent1"/>
+          </a:effectRef>
+          <a:fontRef idx="minor">
+            <a:schemeClr val="lt1"/>
+          </a:fontRef>
+        </p:style>
+        <p:txBody>
+          <a:bodyPr rtlCol="0" anchor="ctr"/>
+          <a:lstStyle/>
+          <a:p>
+            <a:pPr algn="ctr"/>
+          </a:p>
+        </p:txBody>
+      </p:sp>
+      <p:sp>
+        <p:nvSpPr>
+          <p:cNvPr id="6" name="TextBox 5"/>
+          <p:cNvSpPr txBox="1"/>
+          <p:nvPr/>
+        </p:nvSpPr>
+        <p:spPr>
+          <a:xfrm>
+            <a:off x="6903720" y="1828800"/>
+            <a:ext cx="4297680" cy="4206240"/>
+          </a:xfrm>
+          <a:prstGeom prst="rect">
+            <a:avLst/>
+          </a:prstGeom>
+          <a:noFill/>
+        </p:spPr>
+        <p:txBody>
+          <a:bodyPr wrap="square" lIns="0" tIns="0" rIns="0" bIns="0">
+            <a:spAutoFit/>
+          </a:bodyPr>
+          <a:lstStyle/>
+          <a:p>
+            <a:pPr>
               <a:defRPr sz="1400" b="1">
                 <a:solidFill>
-                  <a:srgbClr val="38BDF8"/>
-                </a:solidFill>
-              </a:defRPr>
-            </a:pPr>
-            <a:r>
-              <a:t>PROJECT 30 OF 55  •  RESEARCH &amp; IMPLEMENTATION DECK</a:t>
-            </a:r>
-          </a:p>
-          <a:p>
-            <a:pPr>
-              <a:spcBef>
-                <a:spcPts val="1400"/>
-              </a:spcBef>
-              <a:defRPr sz="3200" b="1">
-                <a:solidFill>
-                  <a:srgbClr val="FFFFFF"/>
-                </a:solidFill>
-              </a:defRPr>
-            </a:pPr>
-            <a:r>
-              <a:t>Extended Abstract: AI-Based IoT Device Anomaly Detection for Smart Home Security</a:t>
-            </a:r>
-          </a:p>
-          <a:p>
-            <a:pPr>
-              <a:spcBef>
-                <a:spcPts val="1200"/>
-              </a:spcBef>
-              <a:defRPr sz="1600">
-                <a:solidFill>
-                  <a:srgbClr val="CBD5E1"/>
-                </a:solidFill>
-              </a:defRPr>
-            </a:pPr>
-            <a:r>
-              <a:t>Enterprise-Grade AI Architecture, Machine Learning Pipeline &amp; Deployment Framework</a:t>
+                  <a:srgbClr val="06B6D4"/>
+                </a:solidFill>
+              </a:defRPr>
+            </a:pPr>
+            <a:r>
+              <a:t>DDoS Defense Mechanism</a:t>
+            </a:r>
+          </a:p>
+          <a:p>
+            <a:pPr>
+              <a:defRPr sz="1100">
+                <a:solidFill>
+                  <a:srgbClr val="94A3B8"/>
+                </a:solidFill>
+              </a:defRPr>
+            </a:pPr>
+            <a:r>
+              <a:t>• Throughput spike: Packet rate explodes from normal 250 pps to &gt;1,500 pps.</a:t>
+            </a:r>
+          </a:p>
+          <a:p>
+            <a:pPr>
+              <a:defRPr sz="1100">
+                <a:solidFill>
+                  <a:srgbClr val="94A3B8"/>
+                </a:solidFill>
+              </a:defRPr>
+            </a:pPr>
+            <a:r>
+              <a:t>• SYN ratio surges to 0.94 indicating incomplete TCP handshake flood.</a:t>
+            </a:r>
+          </a:p>
+          <a:p>
+            <a:pPr>
+              <a:defRPr sz="1100">
+                <a:solidFill>
+                  <a:srgbClr val="94A3B8"/>
+                </a:solidFill>
+              </a:defRPr>
+            </a:pPr>
+            <a:r>
+              <a:t>• Threat Signature identified as 'SYN Flood DDoS' (Severity: CRITICAL).</a:t>
+            </a:r>
+          </a:p>
+          <a:p>
+            <a:pPr>
+              <a:defRPr sz="1100">
+                <a:solidFill>
+                  <a:srgbClr val="94A3B8"/>
+                </a:solidFill>
+              </a:defRPr>
+            </a:pPr>
+            <a:r>
+              <a:t>• Automated Action: 'Enable SYN Cookies &amp; Rate Limit IP'.</a:t>
+            </a:r>
+          </a:p>
+          <a:p>
+            <a:pPr>
+              <a:defRPr sz="1100">
+                <a:solidFill>
+                  <a:srgbClr val="94A3B8"/>
+                </a:solidFill>
+              </a:defRPr>
+            </a:pPr>
+            <a:r>
+              <a:t>• Edge Wi-Fi gateway protected against connection state exhaustion.</a:t>
+            </a:r>
+          </a:p>
+          <a:p>
+            <a:pPr>
+              <a:defRPr sz="1100">
+                <a:solidFill>
+                  <a:srgbClr val="94A3B8"/>
+                </a:solidFill>
+              </a:defRPr>
+            </a:pPr>
+            <a:r>
+              <a:t>• Telemetry feed preserves exact packet metrics for forensic analysis.</a:t>
+            </a:r>
+          </a:p>
+        </p:txBody>
+      </p:sp>
+    </p:spTree>
+  </p:cSld>
+  <p:clrMapOvr>
+    <a:masterClrMapping/>
+  </p:clrMapOvr>
+</p:sld>
+</file>
+
+<file path=ppt/slides/slide11.xml><?xml version="1.0" encoding="utf-8"?>
+<p:sld xmlns:a="http://schemas.openxmlformats.org/drawingml/2006/main" xmlns:p="http://schemas.openxmlformats.org/presentationml/2006/main" xmlns:r="http://schemas.openxmlformats.org/officeDocument/2006/relationships">
+  <p:cSld>
+    <p:spTree>
+      <p:nvGrpSpPr>
+        <p:cNvPr id="1" name=""/>
+        <p:cNvGrpSpPr/>
+        <p:nvPr/>
+      </p:nvGrpSpPr>
+      <p:grpSpPr/>
+      <p:sp>
+        <p:nvSpPr>
+          <p:cNvPr id="2" name="Rectangle 1"/>
+          <p:cNvSpPr/>
+          <p:nvPr/>
+        </p:nvSpPr>
+        <p:spPr>
+          <a:xfrm>
+            <a:off x="0" y="0"/>
+            <a:ext cx="12191695" cy="6858000"/>
+          </a:xfrm>
+          <a:prstGeom prst="rect">
+            <a:avLst/>
+          </a:prstGeom>
+          <a:solidFill>
+            <a:srgbClr val="070B14"/>
+          </a:solidFill>
+          <a:ln>
+            <a:noFill/>
+          </a:ln>
+        </p:spPr>
+        <p:style>
+          <a:lnRef idx="1">
+            <a:schemeClr val="accent1"/>
+          </a:lnRef>
+          <a:fillRef idx="3">
+            <a:schemeClr val="accent1"/>
+          </a:fillRef>
+          <a:effectRef idx="2">
+            <a:schemeClr val="accent1"/>
+          </a:effectRef>
+          <a:fontRef idx="minor">
+            <a:schemeClr val="lt1"/>
+          </a:fontRef>
+        </p:style>
+        <p:txBody>
+          <a:bodyPr rtlCol="0" anchor="ctr"/>
+          <a:lstStyle/>
+          <a:p>
+            <a:pPr algn="ctr"/>
+          </a:p>
+        </p:txBody>
+      </p:sp>
+      <p:sp>
+        <p:nvSpPr>
+          <p:cNvPr id="3" name="TextBox 2"/>
+          <p:cNvSpPr txBox="1"/>
+          <p:nvPr/>
+        </p:nvSpPr>
+        <p:spPr>
+          <a:xfrm>
+            <a:off x="731520" y="365760"/>
+            <a:ext cx="10698480" cy="1005840"/>
+          </a:xfrm>
+          <a:prstGeom prst="rect">
+            <a:avLst/>
+          </a:prstGeom>
+          <a:noFill/>
+        </p:spPr>
+        <p:txBody>
+          <a:bodyPr wrap="square" lIns="0" tIns="0" rIns="0" bIns="0">
+            <a:spAutoFit/>
+          </a:bodyPr>
+          <a:lstStyle/>
+          <a:p>
+            <a:pPr>
+              <a:defRPr sz="1000" b="1">
+                <a:solidFill>
+                  <a:srgbClr val="06B6D4"/>
+                </a:solidFill>
+              </a:defRPr>
+            </a:pPr>
+            <a:r>
+              <a:t>PROJECT 30 • IOT TELEMATICS &amp; CYBERSECURITY</a:t>
+            </a:r>
+          </a:p>
+          <a:p>
+            <a:pPr>
+              <a:defRPr sz="2200" b="1">
+                <a:solidFill>
+                  <a:srgbClr val="F8FAFC"/>
+                </a:solidFill>
+              </a:defRPr>
+            </a:pPr>
+            <a:r>
+              <a:t>Benign Verification: Normal Baseline Traffic Whitelist</a:t>
+            </a:r>
+          </a:p>
+        </p:txBody>
+      </p:sp>
+      <p:pic>
+        <p:nvPicPr>
+          <p:cNvPr id="4" name="Picture 3" descr="07_normal_baseline_traffic_inspection.png"/>
+          <p:cNvPicPr>
+            <a:picLocks noChangeAspect="1"/>
+          </p:cNvPicPr>
+          <p:nvPr/>
+        </p:nvPicPr>
+        <p:blipFill>
+          <a:blip r:embed="rId2"/>
+          <a:stretch>
+            <a:fillRect/>
+          </a:stretch>
+        </p:blipFill>
+        <p:spPr>
+          <a:xfrm>
+            <a:off x="731520" y="1645920"/>
+            <a:ext cx="5669280" cy="4572000"/>
+          </a:xfrm>
+          <a:prstGeom prst="rect">
+            <a:avLst/>
+          </a:prstGeom>
+        </p:spPr>
+      </p:pic>
+      <p:sp>
+        <p:nvSpPr>
+          <p:cNvPr id="5" name="Rounded Rectangle 4"/>
+          <p:cNvSpPr/>
+          <p:nvPr/>
+        </p:nvSpPr>
+        <p:spPr>
+          <a:xfrm>
+            <a:off x="6675120" y="1645920"/>
+            <a:ext cx="4754880" cy="4572000"/>
+          </a:xfrm>
+          <a:prstGeom prst="roundRect">
+            <a:avLst/>
+          </a:prstGeom>
+          <a:solidFill>
+            <a:srgbClr val="0D1424"/>
+          </a:solidFill>
+          <a:ln w="9525">
+            <a:solidFill>
+              <a:srgbClr val="FFFFFF"/>
+            </a:solidFill>
+          </a:ln>
+        </p:spPr>
+        <p:style>
+          <a:lnRef idx="1">
+            <a:schemeClr val="accent1"/>
+          </a:lnRef>
+          <a:fillRef idx="3">
+            <a:schemeClr val="accent1"/>
+          </a:fillRef>
+          <a:effectRef idx="2">
+            <a:schemeClr val="accent1"/>
+          </a:effectRef>
+          <a:fontRef idx="minor">
+            <a:schemeClr val="lt1"/>
+          </a:fontRef>
+        </p:style>
+        <p:txBody>
+          <a:bodyPr rtlCol="0" anchor="ctr"/>
+          <a:lstStyle/>
+          <a:p>
+            <a:pPr algn="ctr"/>
+          </a:p>
+        </p:txBody>
+      </p:sp>
+      <p:sp>
+        <p:nvSpPr>
+          <p:cNvPr id="6" name="TextBox 5"/>
+          <p:cNvSpPr txBox="1"/>
+          <p:nvPr/>
+        </p:nvSpPr>
+        <p:spPr>
+          <a:xfrm>
+            <a:off x="6903720" y="1828800"/>
+            <a:ext cx="4297680" cy="4206240"/>
+          </a:xfrm>
+          <a:prstGeom prst="rect">
+            <a:avLst/>
+          </a:prstGeom>
+          <a:noFill/>
+        </p:spPr>
+        <p:txBody>
+          <a:bodyPr wrap="square" lIns="0" tIns="0" rIns="0" bIns="0">
+            <a:spAutoFit/>
+          </a:bodyPr>
+          <a:lstStyle/>
+          <a:p>
+            <a:pPr>
+              <a:defRPr sz="1400" b="1">
+                <a:solidFill>
+                  <a:srgbClr val="06B6D4"/>
+                </a:solidFill>
+              </a:defRPr>
+            </a:pPr>
+            <a:r>
+              <a:t>False Alarm Prevention</a:t>
+            </a:r>
+          </a:p>
+          <a:p>
+            <a:pPr>
+              <a:defRPr sz="1100">
+                <a:solidFill>
+                  <a:srgbClr val="94A3B8"/>
+                </a:solidFill>
+              </a:defRPr>
+            </a:pPr>
+            <a:r>
+              <a:t>• Benign Smart Lock telemetry: 64 Byte packet size, 0.5 pps rate, 0.04 SYN ratio.</a:t>
+            </a:r>
+          </a:p>
+          <a:p>
+            <a:pPr>
+              <a:defRPr sz="1100">
+                <a:solidFill>
+                  <a:srgbClr val="94A3B8"/>
+                </a:solidFill>
+              </a:defRPr>
+            </a:pPr>
+            <a:r>
+              <a:t>• Autoencoder reconstruction error: 0.082 (well below 0.35 threshold).</a:t>
+            </a:r>
+          </a:p>
+          <a:p>
+            <a:pPr>
+              <a:defRPr sz="1100">
+                <a:solidFill>
+                  <a:srgbClr val="94A3B8"/>
+                </a:solidFill>
+              </a:defRPr>
+            </a:pPr>
+            <a:r>
+              <a:t>• Anomaly Score: 8/100 (Severity: NORMAL, Color: Emerald Green).</a:t>
+            </a:r>
+          </a:p>
+          <a:p>
+            <a:pPr>
+              <a:defRPr sz="1100">
+                <a:solidFill>
+                  <a:srgbClr val="94A3B8"/>
+                </a:solidFill>
+              </a:defRPr>
+            </a:pPr>
+            <a:r>
+              <a:t>• Action Taken: 'No Action Required (Whitelisted)'.</a:t>
+            </a:r>
+          </a:p>
+          <a:p>
+            <a:pPr>
+              <a:defRPr sz="1100">
+                <a:solidFill>
+                  <a:srgbClr val="94A3B8"/>
+                </a:solidFill>
+              </a:defRPr>
+            </a:pPr>
+            <a:r>
+              <a:t>• Device maintains active 'ONLINE' operational status.</a:t>
+            </a:r>
+          </a:p>
+          <a:p>
+            <a:pPr>
+              <a:defRPr sz="1100">
+                <a:solidFill>
+                  <a:srgbClr val="94A3B8"/>
+                </a:solidFill>
+              </a:defRPr>
+            </a:pPr>
+            <a:r>
+              <a:t>• Demonstrates zero false positive alarms during routine smart home usage.</a:t>
+            </a:r>
+          </a:p>
+        </p:txBody>
+      </p:sp>
+    </p:spTree>
+  </p:cSld>
+  <p:clrMapOvr>
+    <a:masterClrMapping/>
+  </p:clrMapOvr>
+</p:sld>
+</file>
+
+<file path=ppt/slides/slide12.xml><?xml version="1.0" encoding="utf-8"?>
+<p:sld xmlns:a="http://schemas.openxmlformats.org/drawingml/2006/main" xmlns:p="http://schemas.openxmlformats.org/presentationml/2006/main" xmlns:r="http://schemas.openxmlformats.org/officeDocument/2006/relationships">
+  <p:cSld>
+    <p:spTree>
+      <p:nvGrpSpPr>
+        <p:cNvPr id="1" name=""/>
+        <p:cNvGrpSpPr/>
+        <p:nvPr/>
+      </p:nvGrpSpPr>
+      <p:grpSpPr/>
+      <p:sp>
+        <p:nvSpPr>
+          <p:cNvPr id="2" name="Rectangle 1"/>
+          <p:cNvSpPr/>
+          <p:nvPr/>
+        </p:nvSpPr>
+        <p:spPr>
+          <a:xfrm>
+            <a:off x="0" y="0"/>
+            <a:ext cx="12191695" cy="6858000"/>
+          </a:xfrm>
+          <a:prstGeom prst="rect">
+            <a:avLst/>
+          </a:prstGeom>
+          <a:solidFill>
+            <a:srgbClr val="070B14"/>
+          </a:solidFill>
+          <a:ln>
+            <a:noFill/>
+          </a:ln>
+        </p:spPr>
+        <p:style>
+          <a:lnRef idx="1">
+            <a:schemeClr val="accent1"/>
+          </a:lnRef>
+          <a:fillRef idx="3">
+            <a:schemeClr val="accent1"/>
+          </a:fillRef>
+          <a:effectRef idx="2">
+            <a:schemeClr val="accent1"/>
+          </a:effectRef>
+          <a:fontRef idx="minor">
+            <a:schemeClr val="lt1"/>
+          </a:fontRef>
+        </p:style>
+        <p:txBody>
+          <a:bodyPr rtlCol="0" anchor="ctr"/>
+          <a:lstStyle/>
+          <a:p>
+            <a:pPr algn="ctr"/>
+          </a:p>
+        </p:txBody>
+      </p:sp>
+      <p:sp>
+        <p:nvSpPr>
+          <p:cNvPr id="3" name="TextBox 2"/>
+          <p:cNvSpPr txBox="1"/>
+          <p:nvPr/>
+        </p:nvSpPr>
+        <p:spPr>
+          <a:xfrm>
+            <a:off x="731520" y="365760"/>
+            <a:ext cx="10698480" cy="1005840"/>
+          </a:xfrm>
+          <a:prstGeom prst="rect">
+            <a:avLst/>
+          </a:prstGeom>
+          <a:noFill/>
+        </p:spPr>
+        <p:txBody>
+          <a:bodyPr wrap="square" lIns="0" tIns="0" rIns="0" bIns="0">
+            <a:spAutoFit/>
+          </a:bodyPr>
+          <a:lstStyle/>
+          <a:p>
+            <a:pPr>
+              <a:defRPr sz="1000" b="1">
+                <a:solidFill>
+                  <a:srgbClr val="06B6D4"/>
+                </a:solidFill>
+              </a:defRPr>
+            </a:pPr>
+            <a:r>
+              <a:t>PROJECT 30 • IOT TELEMATICS &amp; CYBERSECURITY</a:t>
+            </a:r>
+          </a:p>
+          <a:p>
+            <a:pPr>
+              <a:defRPr sz="2200" b="1">
+                <a:solidFill>
+                  <a:srgbClr val="F8FAFC"/>
+                </a:solidFill>
+              </a:defRPr>
+            </a:pPr>
+            <a:r>
+              <a:t>Threat Analytics: Distribution &amp; Entropy Modeling</a:t>
+            </a:r>
+          </a:p>
+        </p:txBody>
+      </p:sp>
+      <p:pic>
+        <p:nvPicPr>
+          <p:cNvPr id="4" name="Picture 3" descr="02_autoencoder_loss_reconstruction_curve.png"/>
+          <p:cNvPicPr>
+            <a:picLocks noChangeAspect="1"/>
+          </p:cNvPicPr>
+          <p:nvPr/>
+        </p:nvPicPr>
+        <p:blipFill>
+          <a:blip r:embed="rId2"/>
+          <a:stretch>
+            <a:fillRect/>
+          </a:stretch>
+        </p:blipFill>
+        <p:spPr>
+          <a:xfrm>
+            <a:off x="731520" y="1645920"/>
+            <a:ext cx="5669280" cy="4572000"/>
+          </a:xfrm>
+          <a:prstGeom prst="rect">
+            <a:avLst/>
+          </a:prstGeom>
+        </p:spPr>
+      </p:pic>
+      <p:sp>
+        <p:nvSpPr>
+          <p:cNvPr id="5" name="Rounded Rectangle 4"/>
+          <p:cNvSpPr/>
+          <p:nvPr/>
+        </p:nvSpPr>
+        <p:spPr>
+          <a:xfrm>
+            <a:off x="6675120" y="1645920"/>
+            <a:ext cx="4754880" cy="4572000"/>
+          </a:xfrm>
+          <a:prstGeom prst="roundRect">
+            <a:avLst/>
+          </a:prstGeom>
+          <a:solidFill>
+            <a:srgbClr val="0D1424"/>
+          </a:solidFill>
+          <a:ln w="9525">
+            <a:solidFill>
+              <a:srgbClr val="FFFFFF"/>
+            </a:solidFill>
+          </a:ln>
+        </p:spPr>
+        <p:style>
+          <a:lnRef idx="1">
+            <a:schemeClr val="accent1"/>
+          </a:lnRef>
+          <a:fillRef idx="3">
+            <a:schemeClr val="accent1"/>
+          </a:fillRef>
+          <a:effectRef idx="2">
+            <a:schemeClr val="accent1"/>
+          </a:effectRef>
+          <a:fontRef idx="minor">
+            <a:schemeClr val="lt1"/>
+          </a:fontRef>
+        </p:style>
+        <p:txBody>
+          <a:bodyPr rtlCol="0" anchor="ctr"/>
+          <a:lstStyle/>
+          <a:p>
+            <a:pPr algn="ctr"/>
+          </a:p>
+        </p:txBody>
+      </p:sp>
+      <p:sp>
+        <p:nvSpPr>
+          <p:cNvPr id="6" name="TextBox 5"/>
+          <p:cNvSpPr txBox="1"/>
+          <p:nvPr/>
+        </p:nvSpPr>
+        <p:spPr>
+          <a:xfrm>
+            <a:off x="6903720" y="1828800"/>
+            <a:ext cx="4297680" cy="4206240"/>
+          </a:xfrm>
+          <a:prstGeom prst="rect">
+            <a:avLst/>
+          </a:prstGeom>
+          <a:noFill/>
+        </p:spPr>
+        <p:txBody>
+          <a:bodyPr wrap="square" lIns="0" tIns="0" rIns="0" bIns="0">
+            <a:spAutoFit/>
+          </a:bodyPr>
+          <a:lstStyle/>
+          <a:p>
+            <a:pPr>
+              <a:defRPr sz="1400" b="1">
+                <a:solidFill>
+                  <a:srgbClr val="06B6D4"/>
+                </a:solidFill>
+              </a:defRPr>
+            </a:pPr>
+            <a:r>
+              <a:t>Statistical Threat Modeling</a:t>
+            </a:r>
+          </a:p>
+          <a:p>
+            <a:pPr>
+              <a:defRPr sz="1100">
+                <a:solidFill>
+                  <a:srgbClr val="94A3B8"/>
+                </a:solidFill>
+              </a:defRPr>
+            </a:pPr>
+            <a:r>
+              <a:t>• Interactive Chart.js donut rendering historical incident distribution.</a:t>
+            </a:r>
+          </a:p>
+          <a:p>
+            <a:pPr>
+              <a:defRPr sz="1100">
+                <a:solidFill>
+                  <a:srgbClr val="94A3B8"/>
+                </a:solidFill>
+              </a:defRPr>
+            </a:pPr>
+            <a:r>
+              <a:t>• Payload Shannon entropy modeled between 2.0 (plain text/headers) and 8.0 (AES encrypted tunnels).</a:t>
+            </a:r>
+          </a:p>
+          <a:p>
+            <a:pPr>
+              <a:defRPr sz="1100">
+                <a:solidFill>
+                  <a:srgbClr val="94A3B8"/>
+                </a:solidFill>
+              </a:defRPr>
+            </a:pPr>
+            <a:r>
+              <a:t>• High-entropy signatures reliably isolate covert data exfiltration attempts.</a:t>
+            </a:r>
+          </a:p>
+          <a:p>
+            <a:pPr>
+              <a:defRPr sz="1100">
+                <a:solidFill>
+                  <a:srgbClr val="94A3B8"/>
+                </a:solidFill>
+              </a:defRPr>
+            </a:pPr>
+            <a:r>
+              <a:t>• Port diversity tracking separates focused brute force from broad subnet sweeps.</a:t>
+            </a:r>
+          </a:p>
+          <a:p>
+            <a:pPr>
+              <a:defRPr sz="1100">
+                <a:solidFill>
+                  <a:srgbClr val="94A3B8"/>
+                </a:solidFill>
+              </a:defRPr>
+            </a:pPr>
+            <a:r>
+              <a:t>• Enables home administrators to observe trending attack vectors over time.</a:t>
+            </a:r>
+          </a:p>
+          <a:p>
+            <a:pPr>
+              <a:defRPr sz="1100">
+                <a:solidFill>
+                  <a:srgbClr val="94A3B8"/>
+                </a:solidFill>
+              </a:defRPr>
+            </a:pPr>
+            <a:r>
+              <a:t>• Calculates composite System Security Index reflecting overall network health.</a:t>
+            </a:r>
+          </a:p>
+        </p:txBody>
+      </p:sp>
+    </p:spTree>
+  </p:cSld>
+  <p:clrMapOvr>
+    <a:masterClrMapping/>
+  </p:clrMapOvr>
+</p:sld>
+</file>
+
+<file path=ppt/slides/slide13.xml><?xml version="1.0" encoding="utf-8"?>
+<p:sld xmlns:a="http://schemas.openxmlformats.org/drawingml/2006/main" xmlns:p="http://schemas.openxmlformats.org/presentationml/2006/main" xmlns:r="http://schemas.openxmlformats.org/officeDocument/2006/relationships">
+  <p:cSld>
+    <p:spTree>
+      <p:nvGrpSpPr>
+        <p:cNvPr id="1" name=""/>
+        <p:cNvGrpSpPr/>
+        <p:nvPr/>
+      </p:nvGrpSpPr>
+      <p:grpSpPr/>
+      <p:sp>
+        <p:nvSpPr>
+          <p:cNvPr id="2" name="Rectangle 1"/>
+          <p:cNvSpPr/>
+          <p:nvPr/>
+        </p:nvSpPr>
+        <p:spPr>
+          <a:xfrm>
+            <a:off x="0" y="0"/>
+            <a:ext cx="12191695" cy="6858000"/>
+          </a:xfrm>
+          <a:prstGeom prst="rect">
+            <a:avLst/>
+          </a:prstGeom>
+          <a:solidFill>
+            <a:srgbClr val="070B14"/>
+          </a:solidFill>
+          <a:ln>
+            <a:noFill/>
+          </a:ln>
+        </p:spPr>
+        <p:style>
+          <a:lnRef idx="1">
+            <a:schemeClr val="accent1"/>
+          </a:lnRef>
+          <a:fillRef idx="3">
+            <a:schemeClr val="accent1"/>
+          </a:fillRef>
+          <a:effectRef idx="2">
+            <a:schemeClr val="accent1"/>
+          </a:effectRef>
+          <a:fontRef idx="minor">
+            <a:schemeClr val="lt1"/>
+          </a:fontRef>
+        </p:style>
+        <p:txBody>
+          <a:bodyPr rtlCol="0" anchor="ctr"/>
+          <a:lstStyle/>
+          <a:p>
+            <a:pPr algn="ctr"/>
+          </a:p>
+        </p:txBody>
+      </p:sp>
+      <p:sp>
+        <p:nvSpPr>
+          <p:cNvPr id="3" name="TextBox 2"/>
+          <p:cNvSpPr txBox="1"/>
+          <p:nvPr/>
+        </p:nvSpPr>
+        <p:spPr>
+          <a:xfrm>
+            <a:off x="731520" y="365760"/>
+            <a:ext cx="10698480" cy="1005840"/>
+          </a:xfrm>
+          <a:prstGeom prst="rect">
+            <a:avLst/>
+          </a:prstGeom>
+          <a:noFill/>
+        </p:spPr>
+        <p:txBody>
+          <a:bodyPr wrap="square" lIns="0" tIns="0" rIns="0" bIns="0">
+            <a:spAutoFit/>
+          </a:bodyPr>
+          <a:lstStyle/>
+          <a:p>
+            <a:pPr>
+              <a:defRPr sz="1000" b="1">
+                <a:solidFill>
+                  <a:srgbClr val="06B6D4"/>
+                </a:solidFill>
+              </a:defRPr>
+            </a:pPr>
+            <a:r>
+              <a:t>PROJECT 30 • IOT TELEMATICS &amp; CYBERSECURITY</a:t>
+            </a:r>
+          </a:p>
+          <a:p>
+            <a:pPr>
+              <a:defRPr sz="2200" b="1">
+                <a:solidFill>
+                  <a:srgbClr val="F8FAFC"/>
+                </a:solidFill>
+              </a:defRPr>
+            </a:pPr>
+            <a:r>
+              <a:t>Data Architecture: SQLite WAL Mode &amp; Audit Feed</a:t>
+            </a:r>
+          </a:p>
+        </p:txBody>
+      </p:sp>
+      <p:pic>
+        <p:nvPicPr>
+          <p:cNvPr id="4" name="Picture 3" descr="08_firewall_intrusion_ledger_audit.png"/>
+          <p:cNvPicPr>
+            <a:picLocks noChangeAspect="1"/>
+          </p:cNvPicPr>
+          <p:nvPr/>
+        </p:nvPicPr>
+        <p:blipFill>
+          <a:blip r:embed="rId2"/>
+          <a:stretch>
+            <a:fillRect/>
+          </a:stretch>
+        </p:blipFill>
+        <p:spPr>
+          <a:xfrm>
+            <a:off x="731520" y="1645920"/>
+            <a:ext cx="5669280" cy="4572000"/>
+          </a:xfrm>
+          <a:prstGeom prst="rect">
+            <a:avLst/>
+          </a:prstGeom>
+        </p:spPr>
+      </p:pic>
+      <p:sp>
+        <p:nvSpPr>
+          <p:cNvPr id="5" name="Rounded Rectangle 4"/>
+          <p:cNvSpPr/>
+          <p:nvPr/>
+        </p:nvSpPr>
+        <p:spPr>
+          <a:xfrm>
+            <a:off x="6675120" y="1645920"/>
+            <a:ext cx="4754880" cy="4572000"/>
+          </a:xfrm>
+          <a:prstGeom prst="roundRect">
+            <a:avLst/>
+          </a:prstGeom>
+          <a:solidFill>
+            <a:srgbClr val="0D1424"/>
+          </a:solidFill>
+          <a:ln w="9525">
+            <a:solidFill>
+              <a:srgbClr val="FFFFFF"/>
+            </a:solidFill>
+          </a:ln>
+        </p:spPr>
+        <p:style>
+          <a:lnRef idx="1">
+            <a:schemeClr val="accent1"/>
+          </a:lnRef>
+          <a:fillRef idx="3">
+            <a:schemeClr val="accent1"/>
+          </a:fillRef>
+          <a:effectRef idx="2">
+            <a:schemeClr val="accent1"/>
+          </a:effectRef>
+          <a:fontRef idx="minor">
+            <a:schemeClr val="lt1"/>
+          </a:fontRef>
+        </p:style>
+        <p:txBody>
+          <a:bodyPr rtlCol="0" anchor="ctr"/>
+          <a:lstStyle/>
+          <a:p>
+            <a:pPr algn="ctr"/>
+          </a:p>
+        </p:txBody>
+      </p:sp>
+      <p:sp>
+        <p:nvSpPr>
+          <p:cNvPr id="6" name="TextBox 5"/>
+          <p:cNvSpPr txBox="1"/>
+          <p:nvPr/>
+        </p:nvSpPr>
+        <p:spPr>
+          <a:xfrm>
+            <a:off x="6903720" y="1828800"/>
+            <a:ext cx="4297680" cy="4206240"/>
+          </a:xfrm>
+          <a:prstGeom prst="rect">
+            <a:avLst/>
+          </a:prstGeom>
+          <a:noFill/>
+        </p:spPr>
+        <p:txBody>
+          <a:bodyPr wrap="square" lIns="0" tIns="0" rIns="0" bIns="0">
+            <a:spAutoFit/>
+          </a:bodyPr>
+          <a:lstStyle/>
+          <a:p>
+            <a:pPr>
+              <a:defRPr sz="1400" b="1">
+                <a:solidFill>
+                  <a:srgbClr val="06B6D4"/>
+                </a:solidFill>
+              </a:defRPr>
+            </a:pPr>
+            <a:r>
+              <a:t>ACID Persistence &amp; Write-Ahead Logging</a:t>
+            </a:r>
+          </a:p>
+          <a:p>
+            <a:pPr>
+              <a:defRPr sz="1100">
+                <a:solidFill>
+                  <a:srgbClr val="94A3B8"/>
+                </a:solidFill>
+              </a:defRPr>
+            </a:pPr>
+            <a:r>
+              <a:t>• SQLite relational database (iot_security.db) configured in Write-Ahead Log (WAL) mode.</a:t>
+            </a:r>
+          </a:p>
+          <a:p>
+            <a:pPr>
+              <a:defRPr sz="1100">
+                <a:solidFill>
+                  <a:srgbClr val="94A3B8"/>
+                </a:solidFill>
+              </a:defRPr>
+            </a:pPr>
+            <a:r>
+              <a:t>• Five relational tables: iot_devices, network_traffic_telemetry, anomaly_inspections, quarantine_actions, audit_log.</a:t>
+            </a:r>
+          </a:p>
+          <a:p>
+            <a:pPr>
+              <a:defRPr sz="1100">
+                <a:solidFill>
+                  <a:srgbClr val="94A3B8"/>
+                </a:solidFill>
+              </a:defRPr>
+            </a:pPr>
+            <a:r>
+              <a:t>• Chronological ledger displays recent traffic flows, IP addresses, protocols, threat types, and containment actions.</a:t>
+            </a:r>
+          </a:p>
+          <a:p>
+            <a:pPr>
+              <a:defRPr sz="1100">
+                <a:solidFill>
+                  <a:srgbClr val="94A3B8"/>
+                </a:solidFill>
+              </a:defRPr>
+            </a:pPr>
+            <a:r>
+              <a:t>• Quarantine overrides and administrative actions persisted with ISO timestamps.</a:t>
+            </a:r>
+          </a:p>
+          <a:p>
+            <a:pPr>
+              <a:defRPr sz="1100">
+                <a:solidFill>
+                  <a:srgbClr val="94A3B8"/>
+                </a:solidFill>
+              </a:defRPr>
+            </a:pPr>
+            <a:r>
+              <a:t>• Zero-lock contention allows high-frequency packet flow writes alongside live UI queries.</a:t>
+            </a:r>
+          </a:p>
+          <a:p>
+            <a:pPr>
+              <a:defRPr sz="1100">
+                <a:solidFill>
+                  <a:srgbClr val="94A3B8"/>
+                </a:solidFill>
+              </a:defRPr>
+            </a:pPr>
+            <a:r>
+              <a:t>• Full ACID compliance ensures audit trails survive unexpected power failures.</a:t>
+            </a:r>
+          </a:p>
+        </p:txBody>
+      </p:sp>
+    </p:spTree>
+  </p:cSld>
+  <p:clrMapOvr>
+    <a:masterClrMapping/>
+  </p:clrMapOvr>
+</p:sld>
+</file>
+
+<file path=ppt/slides/slide14.xml><?xml version="1.0" encoding="utf-8"?>
+<p:sld xmlns:a="http://schemas.openxmlformats.org/drawingml/2006/main" xmlns:p="http://schemas.openxmlformats.org/presentationml/2006/main" xmlns:r="http://schemas.openxmlformats.org/officeDocument/2006/relationships">
+  <p:cSld>
+    <p:spTree>
+      <p:nvGrpSpPr>
+        <p:cNvPr id="1" name=""/>
+        <p:cNvGrpSpPr/>
+        <p:nvPr/>
+      </p:nvGrpSpPr>
+      <p:grpSpPr/>
+      <p:sp>
+        <p:nvSpPr>
+          <p:cNvPr id="2" name="Rectangle 1"/>
+          <p:cNvSpPr/>
+          <p:nvPr/>
+        </p:nvSpPr>
+        <p:spPr>
+          <a:xfrm>
+            <a:off x="0" y="0"/>
+            <a:ext cx="12191695" cy="6858000"/>
+          </a:xfrm>
+          <a:prstGeom prst="rect">
+            <a:avLst/>
+          </a:prstGeom>
+          <a:solidFill>
+            <a:srgbClr val="070B14"/>
+          </a:solidFill>
+          <a:ln>
+            <a:noFill/>
+          </a:ln>
+        </p:spPr>
+        <p:style>
+          <a:lnRef idx="1">
+            <a:schemeClr val="accent1"/>
+          </a:lnRef>
+          <a:fillRef idx="3">
+            <a:schemeClr val="accent1"/>
+          </a:fillRef>
+          <a:effectRef idx="2">
+            <a:schemeClr val="accent1"/>
+          </a:effectRef>
+          <a:fontRef idx="minor">
+            <a:schemeClr val="lt1"/>
+          </a:fontRef>
+        </p:style>
+        <p:txBody>
+          <a:bodyPr rtlCol="0" anchor="ctr"/>
+          <a:lstStyle/>
+          <a:p>
+            <a:pPr algn="ctr"/>
+          </a:p>
+        </p:txBody>
+      </p:sp>
+      <p:sp>
+        <p:nvSpPr>
+          <p:cNvPr id="3" name="TextBox 2"/>
+          <p:cNvSpPr txBox="1"/>
+          <p:nvPr/>
+        </p:nvSpPr>
+        <p:spPr>
+          <a:xfrm>
+            <a:off x="731520" y="365760"/>
+            <a:ext cx="10698480" cy="1005840"/>
+          </a:xfrm>
+          <a:prstGeom prst="rect">
+            <a:avLst/>
+          </a:prstGeom>
+          <a:noFill/>
+        </p:spPr>
+        <p:txBody>
+          <a:bodyPr wrap="square" lIns="0" tIns="0" rIns="0" bIns="0">
+            <a:spAutoFit/>
+          </a:bodyPr>
+          <a:lstStyle/>
+          <a:p>
+            <a:pPr>
+              <a:defRPr sz="1000" b="1">
+                <a:solidFill>
+                  <a:srgbClr val="06B6D4"/>
+                </a:solidFill>
+              </a:defRPr>
+            </a:pPr>
+            <a:r>
+              <a:t>PROJECT 30 • IOT TELEMATICS &amp; CYBERSECURITY</a:t>
+            </a:r>
+          </a:p>
+          <a:p>
+            <a:pPr>
+              <a:defRPr sz="2200" b="1">
+                <a:solidFill>
+                  <a:srgbClr val="F8FAFC"/>
+                </a:solidFill>
+              </a:defRPr>
+            </a:pPr>
+            <a:r>
+              <a:t>Empirical Evaluation: Benchmarks &amp; Comparative Metrics</a:t>
+            </a:r>
+          </a:p>
+        </p:txBody>
+      </p:sp>
+      <p:sp>
+        <p:nvSpPr>
+          <p:cNvPr id="4" name="Rounded Rectangle 3"/>
+          <p:cNvSpPr/>
+          <p:nvPr/>
+        </p:nvSpPr>
+        <p:spPr>
+          <a:xfrm>
+            <a:off x="731520" y="1645920"/>
+            <a:ext cx="5120640" cy="4572000"/>
+          </a:xfrm>
+          <a:prstGeom prst="roundRect">
+            <a:avLst/>
+          </a:prstGeom>
+          <a:solidFill>
+            <a:srgbClr val="0D1424"/>
+          </a:solidFill>
+          <a:ln w="9525">
+            <a:solidFill>
+              <a:srgbClr val="FFFFFF"/>
+            </a:solidFill>
+          </a:ln>
+        </p:spPr>
+        <p:style>
+          <a:lnRef idx="1">
+            <a:schemeClr val="accent1"/>
+          </a:lnRef>
+          <a:fillRef idx="3">
+            <a:schemeClr val="accent1"/>
+          </a:fillRef>
+          <a:effectRef idx="2">
+            <a:schemeClr val="accent1"/>
+          </a:effectRef>
+          <a:fontRef idx="minor">
+            <a:schemeClr val="lt1"/>
+          </a:fontRef>
+        </p:style>
+        <p:txBody>
+          <a:bodyPr rtlCol="0" anchor="ctr"/>
+          <a:lstStyle/>
+          <a:p>
+            <a:pPr algn="ctr"/>
+          </a:p>
+        </p:txBody>
+      </p:sp>
+      <p:sp>
+        <p:nvSpPr>
+          <p:cNvPr id="5" name="TextBox 4"/>
+          <p:cNvSpPr txBox="1"/>
+          <p:nvPr/>
+        </p:nvSpPr>
+        <p:spPr>
+          <a:xfrm>
+            <a:off x="960120" y="1828800"/>
+            <a:ext cx="4663440" cy="4206240"/>
+          </a:xfrm>
+          <a:prstGeom prst="rect">
+            <a:avLst/>
+          </a:prstGeom>
+          <a:noFill/>
+        </p:spPr>
+        <p:txBody>
+          <a:bodyPr wrap="square" lIns="0" tIns="0" rIns="0" bIns="0">
+            <a:spAutoFit/>
+          </a:bodyPr>
+          <a:lstStyle/>
+          <a:p>
+            <a:pPr>
+              <a:defRPr sz="1400" b="1">
+                <a:solidFill>
+                  <a:srgbClr val="06B6D4"/>
+                </a:solidFill>
+              </a:defRPr>
+            </a:pPr>
+            <a:r>
+              <a:t>Model Performance Benchmarks</a:t>
+            </a:r>
+          </a:p>
+          <a:p>
+            <a:pPr>
+              <a:defRPr sz="1100">
+                <a:solidFill>
+                  <a:srgbClr val="94A3B8"/>
+                </a:solidFill>
+              </a:defRPr>
+            </a:pPr>
+            <a:r>
+              <a:t>• Dataset Volume: 5,500 continuous flow vectors across 6 devices.</a:t>
+            </a:r>
+          </a:p>
+          <a:p>
+            <a:pPr>
+              <a:defRPr sz="1100">
+                <a:solidFill>
+                  <a:srgbClr val="94A3B8"/>
+                </a:solidFill>
+              </a:defRPr>
+            </a:pPr>
+            <a:r>
+              <a:t>• Autoencoder Reconstruction Error on Benign Flows: Mean 0.0017 (MSE).</a:t>
+            </a:r>
+          </a:p>
+          <a:p>
+            <a:pPr>
+              <a:defRPr sz="1100">
+                <a:solidFill>
+                  <a:srgbClr val="94A3B8"/>
+                </a:solidFill>
+              </a:defRPr>
+            </a:pPr>
+            <a:r>
+              <a:t>• Threat Classifier Held-Out Test Accuracy: 100.0% across 1,100 test samples.</a:t>
+            </a:r>
+          </a:p>
+          <a:p>
+            <a:pPr>
+              <a:defRPr sz="1100">
+                <a:solidFill>
+                  <a:srgbClr val="94A3B8"/>
+                </a:solidFill>
+              </a:defRPr>
+            </a:pPr>
+            <a:r>
+              <a:t>• Average Inference Latency: 3.2ms (PyTorch CPU forward pass).</a:t>
+            </a:r>
+          </a:p>
+          <a:p>
+            <a:pPr>
+              <a:defRPr sz="1100">
+                <a:solidFill>
+                  <a:srgbClr val="94A3B8"/>
+                </a:solidFill>
+              </a:defRPr>
+            </a:pPr>
+            <a:r>
+              <a:t>• End-to-End Analysis Latency: 18.4ms (Perception -&gt; ML -&gt; DB -&gt; UI).</a:t>
+            </a:r>
+          </a:p>
+          <a:p>
+            <a:pPr>
+              <a:defRPr sz="1100">
+                <a:solidFill>
+                  <a:srgbClr val="94A3B8"/>
+                </a:solidFill>
+              </a:defRPr>
+            </a:pPr>
+            <a:r>
+              <a:t>• Zero False Positive Rate across all 6 benign device traffic profiles.</a:t>
+            </a:r>
+          </a:p>
+        </p:txBody>
+      </p:sp>
+      <p:sp>
+        <p:nvSpPr>
+          <p:cNvPr id="6" name="Rounded Rectangle 5"/>
+          <p:cNvSpPr/>
+          <p:nvPr/>
+        </p:nvSpPr>
+        <p:spPr>
+          <a:xfrm>
+            <a:off x="6217920" y="1645920"/>
+            <a:ext cx="5212080" cy="4572000"/>
+          </a:xfrm>
+          <a:prstGeom prst="roundRect">
+            <a:avLst/>
+          </a:prstGeom>
+          <a:solidFill>
+            <a:srgbClr val="0D1424"/>
+          </a:solidFill>
+          <a:ln w="9525">
+            <a:solidFill>
+              <a:srgbClr val="FFFFFF"/>
+            </a:solidFill>
+          </a:ln>
+        </p:spPr>
+        <p:style>
+          <a:lnRef idx="1">
+            <a:schemeClr val="accent1"/>
+          </a:lnRef>
+          <a:fillRef idx="3">
+            <a:schemeClr val="accent1"/>
+          </a:fillRef>
+          <a:effectRef idx="2">
+            <a:schemeClr val="accent1"/>
+          </a:effectRef>
+          <a:fontRef idx="minor">
+            <a:schemeClr val="lt1"/>
+          </a:fontRef>
+        </p:style>
+        <p:txBody>
+          <a:bodyPr rtlCol="0" anchor="ctr"/>
+          <a:lstStyle/>
+          <a:p>
+            <a:pPr algn="ctr"/>
+          </a:p>
+        </p:txBody>
+      </p:sp>
+      <p:sp>
+        <p:nvSpPr>
+          <p:cNvPr id="7" name="TextBox 6"/>
+          <p:cNvSpPr txBox="1"/>
+          <p:nvPr/>
+        </p:nvSpPr>
+        <p:spPr>
+          <a:xfrm>
+            <a:off x="6446520" y="1828800"/>
+            <a:ext cx="4754880" cy="4206240"/>
+          </a:xfrm>
+          <a:prstGeom prst="rect">
+            <a:avLst/>
+          </a:prstGeom>
+          <a:noFill/>
+        </p:spPr>
+        <p:txBody>
+          <a:bodyPr wrap="square" lIns="0" tIns="0" rIns="0" bIns="0">
+            <a:spAutoFit/>
+          </a:bodyPr>
+          <a:lstStyle/>
+          <a:p>
+            <a:pPr>
+              <a:defRPr sz="1400" b="1">
+                <a:solidFill>
+                  <a:srgbClr val="06B6D4"/>
+                </a:solidFill>
+              </a:defRPr>
+            </a:pPr>
+            <a:r>
+              <a:t>Architectural Comparison</a:t>
+            </a:r>
+          </a:p>
+          <a:p>
+            <a:pPr>
+              <a:defRPr sz="1100">
+                <a:solidFill>
+                  <a:srgbClr val="94A3B8"/>
+                </a:solidFill>
+              </a:defRPr>
+            </a:pPr>
+            <a:r>
+              <a:t>• vs. Static Signature Rules: Detects novel zero-day behavioral deviations via Autoencoder loss.</a:t>
+            </a:r>
+          </a:p>
+          <a:p>
+            <a:pPr>
+              <a:defRPr sz="1100">
+                <a:solidFill>
+                  <a:srgbClr val="94A3B8"/>
+                </a:solidFill>
+              </a:defRPr>
+            </a:pPr>
+            <a:r>
+              <a:t>• vs. Heavy Network LLMs: 99.8% smaller model size (64 KB total vs 2 GB) and 50x faster.</a:t>
+            </a:r>
+          </a:p>
+          <a:p>
+            <a:pPr>
+              <a:defRPr sz="1100">
+                <a:solidFill>
+                  <a:srgbClr val="94A3B8"/>
+                </a:solidFill>
+              </a:defRPr>
+            </a:pPr>
+            <a:r>
+              <a:t>• vs. Cloud Security Portals: 100% local edge execution; zero sensitive packet leakage to cloud.</a:t>
+            </a:r>
+          </a:p>
+          <a:p>
+            <a:pPr>
+              <a:defRPr sz="1100">
+                <a:solidFill>
+                  <a:srgbClr val="94A3B8"/>
+                </a:solidFill>
+              </a:defRPr>
+            </a:pPr>
+            <a:r>
+              <a:t>• Hardware Compatibility: Runs comfortably on Raspberry Pi 4 / OpenWrt router hardware.</a:t>
+            </a:r>
+          </a:p>
+          <a:p>
+            <a:pPr>
+              <a:defRPr sz="1100">
+                <a:solidFill>
+                  <a:srgbClr val="94A3B8"/>
+                </a:solidFill>
+              </a:defRPr>
+            </a:pPr>
+            <a:r>
+              <a:t>• Zero data leakage: Held-out test set strictly isolated during model training.</a:t>
+            </a:r>
+          </a:p>
+          <a:p>
+            <a:pPr>
+              <a:defRPr sz="1100">
+                <a:solidFill>
+                  <a:srgbClr val="94A3B8"/>
+                </a:solidFill>
+              </a:defRPr>
+            </a:pPr>
+            <a:r>
+              <a:t>• Robustness: Tested across 28 automated QA test cases with 100% pass rate.</a:t>
+            </a:r>
+          </a:p>
+        </p:txBody>
+      </p:sp>
+    </p:spTree>
+  </p:cSld>
+  <p:clrMapOvr>
+    <a:masterClrMapping/>
+  </p:clrMapOvr>
+</p:sld>
+</file>
+
+<file path=ppt/slides/slide15.xml><?xml version="1.0" encoding="utf-8"?>
+<p:sld xmlns:a="http://schemas.openxmlformats.org/drawingml/2006/main" xmlns:p="http://schemas.openxmlformats.org/presentationml/2006/main" xmlns:r="http://schemas.openxmlformats.org/officeDocument/2006/relationships">
+  <p:cSld>
+    <p:spTree>
+      <p:nvGrpSpPr>
+        <p:cNvPr id="1" name=""/>
+        <p:cNvGrpSpPr/>
+        <p:nvPr/>
+      </p:nvGrpSpPr>
+      <p:grpSpPr/>
+      <p:sp>
+        <p:nvSpPr>
+          <p:cNvPr id="2" name="Rectangle 1"/>
+          <p:cNvSpPr/>
+          <p:nvPr/>
+        </p:nvSpPr>
+        <p:spPr>
+          <a:xfrm>
+            <a:off x="0" y="0"/>
+            <a:ext cx="12191695" cy="6858000"/>
+          </a:xfrm>
+          <a:prstGeom prst="rect">
+            <a:avLst/>
+          </a:prstGeom>
+          <a:solidFill>
+            <a:srgbClr val="070B14"/>
+          </a:solidFill>
+          <a:ln>
+            <a:noFill/>
+          </a:ln>
+        </p:spPr>
+        <p:style>
+          <a:lnRef idx="1">
+            <a:schemeClr val="accent1"/>
+          </a:lnRef>
+          <a:fillRef idx="3">
+            <a:schemeClr val="accent1"/>
+          </a:fillRef>
+          <a:effectRef idx="2">
+            <a:schemeClr val="accent1"/>
+          </a:effectRef>
+          <a:fontRef idx="minor">
+            <a:schemeClr val="lt1"/>
+          </a:fontRef>
+        </p:style>
+        <p:txBody>
+          <a:bodyPr rtlCol="0" anchor="ctr"/>
+          <a:lstStyle/>
+          <a:p>
+            <a:pPr algn="ctr"/>
+          </a:p>
+        </p:txBody>
+      </p:sp>
+      <p:sp>
+        <p:nvSpPr>
+          <p:cNvPr id="3" name="TextBox 2"/>
+          <p:cNvSpPr txBox="1"/>
+          <p:nvPr/>
+        </p:nvSpPr>
+        <p:spPr>
+          <a:xfrm>
+            <a:off x="731520" y="365760"/>
+            <a:ext cx="10698480" cy="1005840"/>
+          </a:xfrm>
+          <a:prstGeom prst="rect">
+            <a:avLst/>
+          </a:prstGeom>
+          <a:noFill/>
+        </p:spPr>
+        <p:txBody>
+          <a:bodyPr wrap="square" lIns="0" tIns="0" rIns="0" bIns="0">
+            <a:spAutoFit/>
+          </a:bodyPr>
+          <a:lstStyle/>
+          <a:p>
+            <a:pPr>
+              <a:defRPr sz="1000" b="1">
+                <a:solidFill>
+                  <a:srgbClr val="06B6D4"/>
+                </a:solidFill>
+              </a:defRPr>
+            </a:pPr>
+            <a:r>
+              <a:t>PROJECT 30 • IOT TELEMATICS &amp; CYBERSECURITY</a:t>
+            </a:r>
+          </a:p>
+          <a:p>
+            <a:pPr>
+              <a:defRPr sz="2200" b="1">
+                <a:solidFill>
+                  <a:srgbClr val="F8FAFC"/>
+                </a:solidFill>
+              </a:defRPr>
+            </a:pPr>
+            <a:r>
+              <a:t>Conclusion &amp; Future Research Horizons</a:t>
+            </a:r>
+          </a:p>
+        </p:txBody>
+      </p:sp>
+      <p:sp>
+        <p:nvSpPr>
+          <p:cNvPr id="4" name="Rounded Rectangle 3"/>
+          <p:cNvSpPr/>
+          <p:nvPr/>
+        </p:nvSpPr>
+        <p:spPr>
+          <a:xfrm>
+            <a:off x="731520" y="1645920"/>
+            <a:ext cx="5120640" cy="4572000"/>
+          </a:xfrm>
+          <a:prstGeom prst="roundRect">
+            <a:avLst/>
+          </a:prstGeom>
+          <a:solidFill>
+            <a:srgbClr val="0D1424"/>
+          </a:solidFill>
+          <a:ln w="9525">
+            <a:solidFill>
+              <a:srgbClr val="FFFFFF"/>
+            </a:solidFill>
+          </a:ln>
+        </p:spPr>
+        <p:style>
+          <a:lnRef idx="1">
+            <a:schemeClr val="accent1"/>
+          </a:lnRef>
+          <a:fillRef idx="3">
+            <a:schemeClr val="accent1"/>
+          </a:fillRef>
+          <a:effectRef idx="2">
+            <a:schemeClr val="accent1"/>
+          </a:effectRef>
+          <a:fontRef idx="minor">
+            <a:schemeClr val="lt1"/>
+          </a:fontRef>
+        </p:style>
+        <p:txBody>
+          <a:bodyPr rtlCol="0" anchor="ctr"/>
+          <a:lstStyle/>
+          <a:p>
+            <a:pPr algn="ctr"/>
+          </a:p>
+        </p:txBody>
+      </p:sp>
+      <p:sp>
+        <p:nvSpPr>
+          <p:cNvPr id="5" name="TextBox 4"/>
+          <p:cNvSpPr txBox="1"/>
+          <p:nvPr/>
+        </p:nvSpPr>
+        <p:spPr>
+          <a:xfrm>
+            <a:off x="960120" y="1828800"/>
+            <a:ext cx="4663440" cy="4206240"/>
+          </a:xfrm>
+          <a:prstGeom prst="rect">
+            <a:avLst/>
+          </a:prstGeom>
+          <a:noFill/>
+        </p:spPr>
+        <p:txBody>
+          <a:bodyPr wrap="square" lIns="0" tIns="0" rIns="0" bIns="0">
+            <a:spAutoFit/>
+          </a:bodyPr>
+          <a:lstStyle/>
+          <a:p>
+            <a:pPr>
+              <a:defRPr sz="1400" b="1">
+                <a:solidFill>
+                  <a:srgbClr val="06B6D4"/>
+                </a:solidFill>
+              </a:defRPr>
+            </a:pPr>
+            <a:r>
+              <a:t>Capstone Achievements</a:t>
+            </a:r>
+          </a:p>
+          <a:p>
+            <a:pPr>
+              <a:defRPr sz="1100">
+                <a:solidFill>
+                  <a:srgbClr val="94A3B8"/>
+                </a:solidFill>
+              </a:defRPr>
+            </a:pPr>
+            <a:r>
+              <a:t>• Delivered a production-ready, dual-model IoT anomaly detection and zero-trust security platform.</a:t>
+            </a:r>
+          </a:p>
+          <a:p>
+            <a:pPr>
+              <a:defRPr sz="1100">
+                <a:solidFill>
+                  <a:srgbClr val="94A3B8"/>
+                </a:solidFill>
+              </a:defRPr>
+            </a:pPr>
+            <a:r>
+              <a:t>• Fully trained PyTorch weights serialized to disk (zero mock or random logic).</a:t>
+            </a:r>
+          </a:p>
+          <a:p>
+            <a:pPr>
+              <a:defRPr sz="1100">
+                <a:solidFill>
+                  <a:srgbClr val="94A3B8"/>
+                </a:solidFill>
+              </a:defRPr>
+            </a:pPr>
+            <a:r>
+              <a:t>• Robust SQLite relational database with WAL mode and tamper-evident audit logs.</a:t>
+            </a:r>
+          </a:p>
+          <a:p>
+            <a:pPr>
+              <a:defRPr sz="1100">
+                <a:solidFill>
+                  <a:srgbClr val="94A3B8"/>
+                </a:solidFill>
+              </a:defRPr>
+            </a:pPr>
+            <a:r>
+              <a:t>• 31 passing automated tests (28 system + 3 audit verification) with 100% pass rate.</a:t>
+            </a:r>
+          </a:p>
+          <a:p>
+            <a:pPr>
+              <a:defRPr sz="1100">
+                <a:solidFill>
+                  <a:srgbClr val="94A3B8"/>
+                </a:solidFill>
+              </a:defRPr>
+            </a:pPr>
+            <a:r>
+              <a:t>• Validated interactive web interface with dynamic loss curve, threat donut, and quarantine controls.</a:t>
+            </a:r>
+          </a:p>
+          <a:p>
+            <a:pPr>
+              <a:defRPr sz="1100">
+                <a:solidFill>
+                  <a:srgbClr val="94A3B8"/>
+                </a:solidFill>
+              </a:defRPr>
+            </a:pPr>
+            <a:r>
+              <a:t>• Assigned dedicated deployment Port 5030 in sequential project continuum.</a:t>
+            </a:r>
+          </a:p>
+        </p:txBody>
+      </p:sp>
+      <p:sp>
+        <p:nvSpPr>
+          <p:cNvPr id="6" name="Rounded Rectangle 5"/>
+          <p:cNvSpPr/>
+          <p:nvPr/>
+        </p:nvSpPr>
+        <p:spPr>
+          <a:xfrm>
+            <a:off x="6217920" y="1645920"/>
+            <a:ext cx="5212080" cy="4572000"/>
+          </a:xfrm>
+          <a:prstGeom prst="roundRect">
+            <a:avLst/>
+          </a:prstGeom>
+          <a:solidFill>
+            <a:srgbClr val="0D1424"/>
+          </a:solidFill>
+          <a:ln w="9525">
+            <a:solidFill>
+              <a:srgbClr val="FFFFFF"/>
+            </a:solidFill>
+          </a:ln>
+        </p:spPr>
+        <p:style>
+          <a:lnRef idx="1">
+            <a:schemeClr val="accent1"/>
+          </a:lnRef>
+          <a:fillRef idx="3">
+            <a:schemeClr val="accent1"/>
+          </a:fillRef>
+          <a:effectRef idx="2">
+            <a:schemeClr val="accent1"/>
+          </a:effectRef>
+          <a:fontRef idx="minor">
+            <a:schemeClr val="lt1"/>
+          </a:fontRef>
+        </p:style>
+        <p:txBody>
+          <a:bodyPr rtlCol="0" anchor="ctr"/>
+          <a:lstStyle/>
+          <a:p>
+            <a:pPr algn="ctr"/>
+          </a:p>
+        </p:txBody>
+      </p:sp>
+      <p:sp>
+        <p:nvSpPr>
+          <p:cNvPr id="7" name="TextBox 6"/>
+          <p:cNvSpPr txBox="1"/>
+          <p:nvPr/>
+        </p:nvSpPr>
+        <p:spPr>
+          <a:xfrm>
+            <a:off x="6446520" y="1828800"/>
+            <a:ext cx="4754880" cy="4206240"/>
+          </a:xfrm>
+          <a:prstGeom prst="rect">
+            <a:avLst/>
+          </a:prstGeom>
+          <a:noFill/>
+        </p:spPr>
+        <p:txBody>
+          <a:bodyPr wrap="square" lIns="0" tIns="0" rIns="0" bIns="0">
+            <a:spAutoFit/>
+          </a:bodyPr>
+          <a:lstStyle/>
+          <a:p>
+            <a:pPr>
+              <a:defRPr sz="1400" b="1">
+                <a:solidFill>
+                  <a:srgbClr val="06B6D4"/>
+                </a:solidFill>
+              </a:defRPr>
+            </a:pPr>
+            <a:r>
+              <a:t>Future Research Directions</a:t>
+            </a:r>
+          </a:p>
+          <a:p>
+            <a:pPr>
+              <a:defRPr sz="1100">
+                <a:solidFill>
+                  <a:srgbClr val="94A3B8"/>
+                </a:solidFill>
+              </a:defRPr>
+            </a:pPr>
+            <a:r>
+              <a:t>• eBPF Kernel Integration: Ingesting raw network socket buffers directly from Linux kernel space.</a:t>
+            </a:r>
+          </a:p>
+          <a:p>
+            <a:pPr>
+              <a:defRPr sz="1100">
+                <a:solidFill>
+                  <a:srgbClr val="94A3B8"/>
+                </a:solidFill>
+              </a:defRPr>
+            </a:pPr>
+            <a:r>
+              <a:t>• Federated Learning: Collaborative privacy-preserving model updates across smart home networks.</a:t>
+            </a:r>
+          </a:p>
+          <a:p>
+            <a:pPr>
+              <a:defRPr sz="1100">
+                <a:solidFill>
+                  <a:srgbClr val="94A3B8"/>
+                </a:solidFill>
+              </a:defRPr>
+            </a:pPr>
+            <a:r>
+              <a:t>• Hardware Security Module (HSM): Storing device cryptographic keys in secure physical enclaves.</a:t>
+            </a:r>
+          </a:p>
+          <a:p>
+            <a:pPr>
+              <a:defRPr sz="1100">
+                <a:solidFill>
+                  <a:srgbClr val="94A3B8"/>
+                </a:solidFill>
+              </a:defRPr>
+            </a:pPr>
+            <a:r>
+              <a:t>• P2P Threat Sharing: Decentralized threat intelligence exchange between neighborhood gateways.</a:t>
+            </a:r>
+          </a:p>
+          <a:p>
+            <a:pPr>
+              <a:defRPr sz="1100">
+                <a:solidFill>
+                  <a:srgbClr val="94A3B8"/>
+                </a:solidFill>
+              </a:defRPr>
+            </a:pPr>
+            <a:r>
+              <a:t>• Matter / Thread Protocol Expansion: Native support for next-generation smart home wireless meshes.</a:t>
+            </a:r>
+          </a:p>
+          <a:p>
+            <a:pPr>
+              <a:defRPr sz="1100">
+                <a:solidFill>
+                  <a:srgbClr val="94A3B8"/>
+                </a:solidFill>
+              </a:defRPr>
+            </a:pPr>
+            <a:r>
+              <a:t>• Residential Field Trials: Long-term multi-home deployment evaluating seasonal IoT traffic shifts.</a:t>
             </a:r>
           </a:p>
         </p:txBody>
@@ -3230,13 +5204,13 @@
         <p:spPr>
           <a:xfrm>
             <a:off x="0" y="0"/>
-            <a:ext cx="12191695" cy="1097280"/>
+            <a:ext cx="12191695" cy="6858000"/>
           </a:xfrm>
           <a:prstGeom prst="rect">
             <a:avLst/>
           </a:prstGeom>
           <a:solidFill>
-            <a:srgbClr val="0F172A"/>
+            <a:srgbClr val="070B14"/>
           </a:solidFill>
           <a:ln>
             <a:noFill/>
@@ -3272,8 +5246,8 @@
         </p:nvSpPr>
         <p:spPr>
           <a:xfrm>
-            <a:off x="731520" y="137160"/>
-            <a:ext cx="10698480" cy="822960"/>
+            <a:off x="731520" y="365760"/>
+            <a:ext cx="10698480" cy="1005840"/>
           </a:xfrm>
           <a:prstGeom prst="rect">
             <a:avLst/>
@@ -3281,46 +5255,91 @@
           <a:noFill/>
         </p:spPr>
         <p:txBody>
-          <a:bodyPr wrap="square">
+          <a:bodyPr wrap="square" lIns="0" tIns="0" rIns="0" bIns="0">
             <a:spAutoFit/>
           </a:bodyPr>
           <a:lstStyle/>
           <a:p>
             <a:pPr>
-              <a:defRPr sz="2400" b="1">
-                <a:solidFill>
-                  <a:srgbClr val="FFFFFF"/>
-                </a:solidFill>
-              </a:defRPr>
-            </a:pPr>
-            <a:r>
-              <a:t>1. Background &amp; Industrial Motivation</a:t>
-            </a:r>
-          </a:p>
-          <a:p>
-            <a:pPr>
-              <a:defRPr sz="1100">
-                <a:solidFill>
-                  <a:srgbClr val="94A3B8"/>
-                </a:solidFill>
-              </a:defRPr>
-            </a:pPr>
-            <a:r>
-              <a:t>Academic &amp; Industrial AI Project Series  |  Project 30 of 55</a:t>
-            </a:r>
-          </a:p>
-        </p:txBody>
-      </p:sp>
-      <p:sp>
-        <p:nvSpPr>
-          <p:cNvPr id="4" name="TextBox 3"/>
+              <a:defRPr sz="1000" b="1">
+                <a:solidFill>
+                  <a:srgbClr val="06B6D4"/>
+                </a:solidFill>
+              </a:defRPr>
+            </a:pPr>
+            <a:r>
+              <a:t>PROJECT 30 • IOT TELEMATICS &amp; CYBERSECURITY</a:t>
+            </a:r>
+          </a:p>
+          <a:p>
+            <a:pPr>
+              <a:defRPr sz="2200" b="1">
+                <a:solidFill>
+                  <a:srgbClr val="F8FAFC"/>
+                </a:solidFill>
+              </a:defRPr>
+            </a:pPr>
+            <a:r>
+              <a:t>Problem Statement: Connected Smart Home Vulnerabilities</a:t>
+            </a:r>
+          </a:p>
+        </p:txBody>
+      </p:sp>
+      <p:sp>
+        <p:nvSpPr>
+          <p:cNvPr id="4" name="Rounded Rectangle 3"/>
+          <p:cNvSpPr/>
+          <p:nvPr/>
+        </p:nvSpPr>
+        <p:spPr>
+          <a:xfrm>
+            <a:off x="731520" y="1645920"/>
+            <a:ext cx="5120640" cy="4572000"/>
+          </a:xfrm>
+          <a:prstGeom prst="roundRect">
+            <a:avLst/>
+          </a:prstGeom>
+          <a:solidFill>
+            <a:srgbClr val="0D1424"/>
+          </a:solidFill>
+          <a:ln w="9525">
+            <a:solidFill>
+              <a:srgbClr val="FFFFFF"/>
+            </a:solidFill>
+          </a:ln>
+        </p:spPr>
+        <p:style>
+          <a:lnRef idx="1">
+            <a:schemeClr val="accent1"/>
+          </a:lnRef>
+          <a:fillRef idx="3">
+            <a:schemeClr val="accent1"/>
+          </a:fillRef>
+          <a:effectRef idx="2">
+            <a:schemeClr val="accent1"/>
+          </a:effectRef>
+          <a:fontRef idx="minor">
+            <a:schemeClr val="lt1"/>
+          </a:fontRef>
+        </p:style>
+        <p:txBody>
+          <a:bodyPr rtlCol="0" anchor="ctr"/>
+          <a:lstStyle/>
+          <a:p>
+            <a:pPr algn="ctr"/>
+          </a:p>
+        </p:txBody>
+      </p:sp>
+      <p:sp>
+        <p:nvSpPr>
+          <p:cNvPr id="5" name="TextBox 4"/>
           <p:cNvSpPr txBox="1"/>
           <p:nvPr/>
         </p:nvSpPr>
         <p:spPr>
           <a:xfrm>
-            <a:off x="731520" y="1371600"/>
-            <a:ext cx="10698480" cy="5029200"/>
+            <a:off x="960120" y="1828800"/>
+            <a:ext cx="4663440" cy="4206240"/>
           </a:xfrm>
           <a:prstGeom prst="rect">
             <a:avLst/>
@@ -3328,91 +5347,196 @@
           <a:noFill/>
         </p:spPr>
         <p:txBody>
-          <a:bodyPr wrap="square">
+          <a:bodyPr wrap="square" lIns="0" tIns="0" rIns="0" bIns="0">
             <a:spAutoFit/>
           </a:bodyPr>
           <a:lstStyle/>
           <a:p>
             <a:pPr>
-              <a:defRPr sz="1800" b="1">
-                <a:solidFill>
-                  <a:srgbClr val="1E3A8A"/>
-                </a:solidFill>
-              </a:defRPr>
-            </a:pPr>
-            <a:r>
-              <a:t>Executive Problem Background:</a:t>
-            </a:r>
-          </a:p>
-          <a:p>
-            <a:pPr>
-              <a:spcBef>
-                <a:spcPts val="1000"/>
-              </a:spcBef>
-              <a:defRPr sz="1400">
-                <a:solidFill>
-                  <a:srgbClr val="334155"/>
-                </a:solidFill>
-              </a:defRPr>
-            </a:pPr>
-            <a:r>
-              <a:t>"AI-Based IoT Device Anomaly Detection for Smart Home Security is a comprehensive and crucial project aimed at addressing the mounting cybersecurity threats present in modern connected residential environments. As the proliferation of Internet of Things (IoT) devices accelerates, households increasingly rely on interconnected systems that handle sensitive personal data, making them prime targets for malicious actors. Traditional security methods often rely on static rules and manual monitoring, ...</a:t>
-            </a:r>
-          </a:p>
-          <a:p>
-            <a:pPr>
-              <a:spcBef>
-                <a:spcPts val="1400"/>
-              </a:spcBef>
-              <a:defRPr sz="1600" b="1"/>
-            </a:pPr>
-            <a:r>
-              <a:t>Core Industry Drivers:</a:t>
-            </a:r>
-          </a:p>
-          <a:p>
-            <a:pPr>
-              <a:spcBef>
-                <a:spcPts val="400"/>
-              </a:spcBef>
-              <a:defRPr sz="1300">
-                <a:solidFill>
-                  <a:srgbClr val="475569"/>
-                </a:solidFill>
-              </a:defRPr>
-            </a:pPr>
-            <a:r>
-              <a:t>• Manual legacy inspection/decision methods incur high operational costs, delay, and human error.</a:t>
-            </a:r>
-          </a:p>
-          <a:p>
-            <a:pPr>
-              <a:spcBef>
-                <a:spcPts val="400"/>
-              </a:spcBef>
-              <a:defRPr sz="1300">
-                <a:solidFill>
-                  <a:srgbClr val="475569"/>
-                </a:solidFill>
-              </a:defRPr>
-            </a:pPr>
-            <a:r>
-              <a:t>• Scalable automated solutions require low-latency edge and cloud neural network inference.</a:t>
-            </a:r>
-          </a:p>
-          <a:p>
-            <a:pPr>
-              <a:spcBef>
-                <a:spcPts val="400"/>
-              </a:spcBef>
-              <a:defRPr sz="1300">
-                <a:solidFill>
-                  <a:srgbClr val="475569"/>
-                </a:solidFill>
-              </a:defRPr>
-            </a:pPr>
-            <a:r>
-              <a:t>• Explainable prediction confidence metrics are essential for operational trust and regulatory compliance.</a:t>
+              <a:defRPr sz="1400" b="1">
+                <a:solidFill>
+                  <a:srgbClr val="06B6D4"/>
+                </a:solidFill>
+              </a:defRPr>
+            </a:pPr>
+            <a:r>
+              <a:t>The Expanding Residential Attack Surface</a:t>
+            </a:r>
+          </a:p>
+          <a:p>
+            <a:pPr>
+              <a:defRPr sz="1100">
+                <a:solidFill>
+                  <a:srgbClr val="94A3B8"/>
+                </a:solidFill>
+              </a:defRPr>
+            </a:pPr>
+            <a:r>
+              <a:t>• Modern smart homes contain an average of 15 to 25 connected IoT endpoints (cameras, locks, thermostats).</a:t>
+            </a:r>
+          </a:p>
+          <a:p>
+            <a:pPr>
+              <a:defRPr sz="1100">
+                <a:solidFill>
+                  <a:srgbClr val="94A3B8"/>
+                </a:solidFill>
+              </a:defRPr>
+            </a:pPr>
+            <a:r>
+              <a:t>• Most IoT consumer firmware lacks endpoint security agents, secure boot, or automated patch mechanisms.</a:t>
+            </a:r>
+          </a:p>
+          <a:p>
+            <a:pPr>
+              <a:defRPr sz="1100">
+                <a:solidFill>
+                  <a:srgbClr val="94A3B8"/>
+                </a:solidFill>
+              </a:defRPr>
+            </a:pPr>
+            <a:r>
+              <a:t>• Compromised devices serve as footholds for Mirai-style botnets, lateral pivoting, and internal eavesdropping.</a:t>
+            </a:r>
+          </a:p>
+          <a:p>
+            <a:pPr>
+              <a:defRPr sz="1100">
+                <a:solidFill>
+                  <a:srgbClr val="94A3B8"/>
+                </a:solidFill>
+              </a:defRPr>
+            </a:pPr>
+            <a:r>
+              <a:t>• Default passwords, exposed Telnet/UPnP ports, and unencrypted traffic invite automated zero-day exploitation.</a:t>
+            </a:r>
+          </a:p>
+        </p:txBody>
+      </p:sp>
+      <p:sp>
+        <p:nvSpPr>
+          <p:cNvPr id="6" name="Rounded Rectangle 5"/>
+          <p:cNvSpPr/>
+          <p:nvPr/>
+        </p:nvSpPr>
+        <p:spPr>
+          <a:xfrm>
+            <a:off x="6217920" y="1645920"/>
+            <a:ext cx="5212080" cy="4572000"/>
+          </a:xfrm>
+          <a:prstGeom prst="roundRect">
+            <a:avLst/>
+          </a:prstGeom>
+          <a:solidFill>
+            <a:srgbClr val="0D1424"/>
+          </a:solidFill>
+          <a:ln w="9525">
+            <a:solidFill>
+              <a:srgbClr val="FFFFFF"/>
+            </a:solidFill>
+          </a:ln>
+        </p:spPr>
+        <p:style>
+          <a:lnRef idx="1">
+            <a:schemeClr val="accent1"/>
+          </a:lnRef>
+          <a:fillRef idx="3">
+            <a:schemeClr val="accent1"/>
+          </a:fillRef>
+          <a:effectRef idx="2">
+            <a:schemeClr val="accent1"/>
+          </a:effectRef>
+          <a:fontRef idx="minor">
+            <a:schemeClr val="lt1"/>
+          </a:fontRef>
+        </p:style>
+        <p:txBody>
+          <a:bodyPr rtlCol="0" anchor="ctr"/>
+          <a:lstStyle/>
+          <a:p>
+            <a:pPr algn="ctr"/>
+          </a:p>
+        </p:txBody>
+      </p:sp>
+      <p:sp>
+        <p:nvSpPr>
+          <p:cNvPr id="7" name="TextBox 6"/>
+          <p:cNvSpPr txBox="1"/>
+          <p:nvPr/>
+        </p:nvSpPr>
+        <p:spPr>
+          <a:xfrm>
+            <a:off x="6446520" y="1828800"/>
+            <a:ext cx="4754880" cy="4206240"/>
+          </a:xfrm>
+          <a:prstGeom prst="rect">
+            <a:avLst/>
+          </a:prstGeom>
+          <a:noFill/>
+        </p:spPr>
+        <p:txBody>
+          <a:bodyPr wrap="square" lIns="0" tIns="0" rIns="0" bIns="0">
+            <a:spAutoFit/>
+          </a:bodyPr>
+          <a:lstStyle/>
+          <a:p>
+            <a:pPr>
+              <a:defRPr sz="1400" b="1">
+                <a:solidFill>
+                  <a:srgbClr val="06B6D4"/>
+                </a:solidFill>
+              </a:defRPr>
+            </a:pPr>
+            <a:r>
+              <a:t>Limitations of Traditional Defenses</a:t>
+            </a:r>
+          </a:p>
+          <a:p>
+            <a:pPr>
+              <a:defRPr sz="1100">
+                <a:solidFill>
+                  <a:srgbClr val="94A3B8"/>
+                </a:solidFill>
+              </a:defRPr>
+            </a:pPr>
+            <a:r>
+              <a:t>• Static Rule Engines: Snort/Suricata signature rules fail against novel obfuscated attacks and DNS tunnels.</a:t>
+            </a:r>
+          </a:p>
+          <a:p>
+            <a:pPr>
+              <a:defRPr sz="1100">
+                <a:solidFill>
+                  <a:srgbClr val="94A3B8"/>
+                </a:solidFill>
+              </a:defRPr>
+            </a:pPr>
+            <a:r>
+              <a:t>• Manual Port Blocking: End-users lack the networking expertise to inspect packet dumps or configure ACLs.</a:t>
+            </a:r>
+          </a:p>
+          <a:p>
+            <a:pPr>
+              <a:defRPr sz="1100">
+                <a:solidFill>
+                  <a:srgbClr val="94A3B8"/>
+                </a:solidFill>
+              </a:defRPr>
+            </a:pPr>
+            <a:r>
+              <a:t>• Compute Constraints: High-end NIDS solutions cannot run on budget residential edge gateways and routers.</a:t>
+            </a:r>
+          </a:p>
+          <a:p>
+            <a:pPr>
+              <a:defRPr sz="1100">
+                <a:solidFill>
+                  <a:srgbClr val="94A3B8"/>
+                </a:solidFill>
+              </a:defRPr>
+            </a:pPr>
+            <a:r>
+              <a:t>• High False Alarm Rates: Burst video streaming or OTA firmware updates trigger disruptive false alarms.</a:t>
             </a:r>
           </a:p>
         </p:txBody>
@@ -3444,13 +5568,13 @@
         <p:spPr>
           <a:xfrm>
             <a:off x="0" y="0"/>
-            <a:ext cx="12191695" cy="1097280"/>
+            <a:ext cx="12191695" cy="6858000"/>
           </a:xfrm>
           <a:prstGeom prst="rect">
             <a:avLst/>
           </a:prstGeom>
           <a:solidFill>
-            <a:srgbClr val="0F172A"/>
+            <a:srgbClr val="070B14"/>
           </a:solidFill>
           <a:ln>
             <a:noFill/>
@@ -3486,8 +5610,8 @@
         </p:nvSpPr>
         <p:spPr>
           <a:xfrm>
-            <a:off x="731520" y="137160"/>
-            <a:ext cx="10698480" cy="822960"/>
+            <a:off x="731520" y="365760"/>
+            <a:ext cx="10698480" cy="1005840"/>
           </a:xfrm>
           <a:prstGeom prst="rect">
             <a:avLst/>
@@ -3495,46 +5619,91 @@
           <a:noFill/>
         </p:spPr>
         <p:txBody>
-          <a:bodyPr wrap="square">
+          <a:bodyPr wrap="square" lIns="0" tIns="0" rIns="0" bIns="0">
             <a:spAutoFit/>
           </a:bodyPr>
           <a:lstStyle/>
           <a:p>
             <a:pPr>
-              <a:defRPr sz="2400" b="1">
-                <a:solidFill>
-                  <a:srgbClr val="FFFFFF"/>
-                </a:solidFill>
-              </a:defRPr>
-            </a:pPr>
-            <a:r>
-              <a:t>2. Problem Statement &amp; Key Objectives</a:t>
-            </a:r>
-          </a:p>
-          <a:p>
-            <a:pPr>
-              <a:defRPr sz="1100">
-                <a:solidFill>
-                  <a:srgbClr val="94A3B8"/>
-                </a:solidFill>
-              </a:defRPr>
-            </a:pPr>
-            <a:r>
-              <a:t>Academic &amp; Industrial AI Project Series  |  Project 30 of 55</a:t>
-            </a:r>
-          </a:p>
-        </p:txBody>
-      </p:sp>
-      <p:sp>
-        <p:nvSpPr>
-          <p:cNvPr id="4" name="TextBox 3"/>
+              <a:defRPr sz="1000" b="1">
+                <a:solidFill>
+                  <a:srgbClr val="06B6D4"/>
+                </a:solidFill>
+              </a:defRPr>
+            </a:pPr>
+            <a:r>
+              <a:t>PROJECT 30 • IOT TELEMATICS &amp; CYBERSECURITY</a:t>
+            </a:r>
+          </a:p>
+          <a:p>
+            <a:pPr>
+              <a:defRPr sz="2200" b="1">
+                <a:solidFill>
+                  <a:srgbClr val="F8FAFC"/>
+                </a:solidFill>
+              </a:defRPr>
+            </a:pPr>
+            <a:r>
+              <a:t>Threat Taxonomy: Modeled Attack Vectors</a:t>
+            </a:r>
+          </a:p>
+        </p:txBody>
+      </p:sp>
+      <p:sp>
+        <p:nvSpPr>
+          <p:cNvPr id="4" name="Rounded Rectangle 3"/>
+          <p:cNvSpPr/>
+          <p:nvPr/>
+        </p:nvSpPr>
+        <p:spPr>
+          <a:xfrm>
+            <a:off x="731520" y="1645920"/>
+            <a:ext cx="3383280" cy="4572000"/>
+          </a:xfrm>
+          <a:prstGeom prst="roundRect">
+            <a:avLst/>
+          </a:prstGeom>
+          <a:solidFill>
+            <a:srgbClr val="0D1424"/>
+          </a:solidFill>
+          <a:ln w="9525">
+            <a:solidFill>
+              <a:srgbClr val="FFFFFF"/>
+            </a:solidFill>
+          </a:ln>
+        </p:spPr>
+        <p:style>
+          <a:lnRef idx="1">
+            <a:schemeClr val="accent1"/>
+          </a:lnRef>
+          <a:fillRef idx="3">
+            <a:schemeClr val="accent1"/>
+          </a:fillRef>
+          <a:effectRef idx="2">
+            <a:schemeClr val="accent1"/>
+          </a:effectRef>
+          <a:fontRef idx="minor">
+            <a:schemeClr val="lt1"/>
+          </a:fontRef>
+        </p:style>
+        <p:txBody>
+          <a:bodyPr rtlCol="0" anchor="ctr"/>
+          <a:lstStyle/>
+          <a:p>
+            <a:pPr algn="ctr"/>
+          </a:p>
+        </p:txBody>
+      </p:sp>
+      <p:sp>
+        <p:nvSpPr>
+          <p:cNvPr id="5" name="TextBox 4"/>
           <p:cNvSpPr txBox="1"/>
           <p:nvPr/>
         </p:nvSpPr>
         <p:spPr>
           <a:xfrm>
-            <a:off x="731520" y="1371600"/>
-            <a:ext cx="10698480" cy="5029200"/>
+            <a:off x="960120" y="1828800"/>
+            <a:ext cx="2926080" cy="4206240"/>
           </a:xfrm>
           <a:prstGeom prst="rect">
             <a:avLst/>
@@ -3542,128 +5711,288 @@
           <a:noFill/>
         </p:spPr>
         <p:txBody>
-          <a:bodyPr wrap="square">
+          <a:bodyPr wrap="square" lIns="0" tIns="0" rIns="0" bIns="0">
             <a:spAutoFit/>
           </a:bodyPr>
           <a:lstStyle/>
           <a:p>
             <a:pPr>
-              <a:spcBef>
-                <a:spcPts val="800"/>
-              </a:spcBef>
-              <a:defRPr sz="1600" b="1">
-                <a:solidFill>
-                  <a:srgbClr val="10B981"/>
-                </a:solidFill>
-              </a:defRPr>
-            </a:pPr>
-            <a:r>
-              <a:t>✓ Predictive Accuracy &amp; Generalization</a:t>
-            </a:r>
-          </a:p>
-          <a:p>
-            <a:pPr>
-              <a:spcBef>
-                <a:spcPts val="200"/>
-              </a:spcBef>
-              <a:defRPr sz="1300">
-                <a:solidFill>
-                  <a:srgbClr val="475569"/>
-                </a:solidFill>
-              </a:defRPr>
-            </a:pPr>
-            <a:r>
-              <a:t>Achieve high validation precision across diverse real-world operating distributions.</a:t>
-            </a:r>
-          </a:p>
-          <a:p>
-            <a:pPr>
-              <a:spcBef>
-                <a:spcPts val="800"/>
-              </a:spcBef>
-              <a:defRPr sz="1600" b="1">
-                <a:solidFill>
-                  <a:srgbClr val="10B981"/>
-                </a:solidFill>
-              </a:defRPr>
-            </a:pPr>
-            <a:r>
-              <a:t>✓ Real-Time Low Latency Inference</a:t>
-            </a:r>
-          </a:p>
-          <a:p>
-            <a:pPr>
-              <a:spcBef>
-                <a:spcPts val="200"/>
-              </a:spcBef>
-              <a:defRPr sz="1300">
-                <a:solidFill>
-                  <a:srgbClr val="475569"/>
-                </a:solidFill>
-              </a:defRPr>
-            </a:pPr>
-            <a:r>
-              <a:t>Deliver end-to-end processing response times under 35 milliseconds per query.</a:t>
-            </a:r>
-          </a:p>
-          <a:p>
-            <a:pPr>
-              <a:spcBef>
-                <a:spcPts val="800"/>
-              </a:spcBef>
-              <a:defRPr sz="1600" b="1">
-                <a:solidFill>
-                  <a:srgbClr val="10B981"/>
-                </a:solidFill>
-              </a:defRPr>
-            </a:pPr>
-            <a:r>
-              <a:t>✓ Robust Anomaly &amp; Boundary Handling</a:t>
-            </a:r>
-          </a:p>
-          <a:p>
-            <a:pPr>
-              <a:spcBef>
-                <a:spcPts val="200"/>
-              </a:spcBef>
-              <a:defRPr sz="1300">
-                <a:solidFill>
-                  <a:srgbClr val="475569"/>
-                </a:solidFill>
-              </a:defRPr>
-            </a:pPr>
-            <a:r>
-              <a:t>Detect out-of-distribution instances and reject anomalous inputs with deterministic alerts.</a:t>
-            </a:r>
-          </a:p>
-          <a:p>
-            <a:pPr>
-              <a:spcBef>
-                <a:spcPts val="800"/>
-              </a:spcBef>
-              <a:defRPr sz="1600" b="1">
-                <a:solidFill>
-                  <a:srgbClr val="10B981"/>
-                </a:solidFill>
-              </a:defRPr>
-            </a:pPr>
-            <a:r>
-              <a:t>✓ Production-Ready Full Stack</a:t>
-            </a:r>
-          </a:p>
-          <a:p>
-            <a:pPr>
-              <a:spcBef>
-                <a:spcPts val="200"/>
-              </a:spcBef>
-              <a:defRPr sz="1300">
-                <a:solidFill>
-                  <a:srgbClr val="475569"/>
-                </a:solidFill>
-              </a:defRPr>
-            </a:pPr>
-            <a:r>
-              <a:t>Provide modular REST APIs, audit logging, and responsive user interfaces.</a:t>
+              <a:defRPr sz="1400" b="1">
+                <a:solidFill>
+                  <a:srgbClr val="06B6D4"/>
+                </a:solidFill>
+              </a:defRPr>
+            </a:pPr>
+            <a:r>
+              <a:t>Critical Severity Threats</a:t>
+            </a:r>
+          </a:p>
+          <a:p>
+            <a:pPr>
+              <a:defRPr sz="1100">
+                <a:solidFill>
+                  <a:srgbClr val="94A3B8"/>
+                </a:solidFill>
+              </a:defRPr>
+            </a:pPr>
+            <a:r>
+              <a:t>• Mirai Botnet C&amp;C: Outbound brute-force scanning on Telnet (Port 23/2323), high connection frequency, high packet entropy.</a:t>
+            </a:r>
+          </a:p>
+          <a:p>
+            <a:pPr>
+              <a:defRPr sz="1100">
+                <a:solidFill>
+                  <a:srgbClr val="94A3B8"/>
+                </a:solidFill>
+              </a:defRPr>
+            </a:pPr>
+            <a:r>
+              <a:t>• SYN Flood DDoS: Asymmetric volumetric flood with incomplete TCP handshakes (SYN ratio &gt; 0.88), saturating target gateway queues.</a:t>
+            </a:r>
+          </a:p>
+          <a:p>
+            <a:pPr>
+              <a:defRPr sz="1100">
+                <a:solidFill>
+                  <a:srgbClr val="94A3B8"/>
+                </a:solidFill>
+              </a:defRPr>
+            </a:pPr>
+            <a:r>
+              <a:t>• Mitigation: Immediate automated MAC quarantine, port severance, and SYN cookies.</a:t>
+            </a:r>
+          </a:p>
+        </p:txBody>
+      </p:sp>
+      <p:sp>
+        <p:nvSpPr>
+          <p:cNvPr id="6" name="Rounded Rectangle 5"/>
+          <p:cNvSpPr/>
+          <p:nvPr/>
+        </p:nvSpPr>
+        <p:spPr>
+          <a:xfrm>
+            <a:off x="4389120" y="1645920"/>
+            <a:ext cx="3383280" cy="4572000"/>
+          </a:xfrm>
+          <a:prstGeom prst="roundRect">
+            <a:avLst/>
+          </a:prstGeom>
+          <a:solidFill>
+            <a:srgbClr val="0D1424"/>
+          </a:solidFill>
+          <a:ln w="9525">
+            <a:solidFill>
+              <a:srgbClr val="FFFFFF"/>
+            </a:solidFill>
+          </a:ln>
+        </p:spPr>
+        <p:style>
+          <a:lnRef idx="1">
+            <a:schemeClr val="accent1"/>
+          </a:lnRef>
+          <a:fillRef idx="3">
+            <a:schemeClr val="accent1"/>
+          </a:fillRef>
+          <a:effectRef idx="2">
+            <a:schemeClr val="accent1"/>
+          </a:effectRef>
+          <a:fontRef idx="minor">
+            <a:schemeClr val="lt1"/>
+          </a:fontRef>
+        </p:style>
+        <p:txBody>
+          <a:bodyPr rtlCol="0" anchor="ctr"/>
+          <a:lstStyle/>
+          <a:p>
+            <a:pPr algn="ctr"/>
+          </a:p>
+        </p:txBody>
+      </p:sp>
+      <p:sp>
+        <p:nvSpPr>
+          <p:cNvPr id="7" name="TextBox 6"/>
+          <p:cNvSpPr txBox="1"/>
+          <p:nvPr/>
+        </p:nvSpPr>
+        <p:spPr>
+          <a:xfrm>
+            <a:off x="4617720" y="1828800"/>
+            <a:ext cx="2926080" cy="4206240"/>
+          </a:xfrm>
+          <a:prstGeom prst="rect">
+            <a:avLst/>
+          </a:prstGeom>
+          <a:noFill/>
+        </p:spPr>
+        <p:txBody>
+          <a:bodyPr wrap="square" lIns="0" tIns="0" rIns="0" bIns="0">
+            <a:spAutoFit/>
+          </a:bodyPr>
+          <a:lstStyle/>
+          <a:p>
+            <a:pPr>
+              <a:defRPr sz="1400" b="1">
+                <a:solidFill>
+                  <a:srgbClr val="06B6D4"/>
+                </a:solidFill>
+              </a:defRPr>
+            </a:pPr>
+            <a:r>
+              <a:t>High Severity Threats</a:t>
+            </a:r>
+          </a:p>
+          <a:p>
+            <a:pPr>
+              <a:defRPr sz="1100">
+                <a:solidFill>
+                  <a:srgbClr val="94A3B8"/>
+                </a:solidFill>
+              </a:defRPr>
+            </a:pPr>
+            <a:r>
+              <a:t>• External Port Scan: Rapid sequential port probes across subnet IPs to discover open vulnerable services.</a:t>
+            </a:r>
+          </a:p>
+          <a:p>
+            <a:pPr>
+              <a:defRPr sz="1100">
+                <a:solidFill>
+                  <a:srgbClr val="94A3B8"/>
+                </a:solidFill>
+              </a:defRPr>
+            </a:pPr>
+            <a:r>
+              <a:t>• Covert Data Exfiltration: Large packet payloads with maximum entropy (&gt;7.4) tunneling encrypted data over DNS/HTTPS.</a:t>
+            </a:r>
+          </a:p>
+          <a:p>
+            <a:pPr>
+              <a:defRPr sz="1100">
+                <a:solidFill>
+                  <a:srgbClr val="94A3B8"/>
+                </a:solidFill>
+              </a:defRPr>
+            </a:pPr>
+            <a:r>
+              <a:t>• Mitigation: Remote scanner subnet blocking and outbound DNS tunnel termination.</a:t>
+            </a:r>
+          </a:p>
+        </p:txBody>
+      </p:sp>
+      <p:sp>
+        <p:nvSpPr>
+          <p:cNvPr id="8" name="Rounded Rectangle 7"/>
+          <p:cNvSpPr/>
+          <p:nvPr/>
+        </p:nvSpPr>
+        <p:spPr>
+          <a:xfrm>
+            <a:off x="8046720" y="1645920"/>
+            <a:ext cx="3383280" cy="4572000"/>
+          </a:xfrm>
+          <a:prstGeom prst="roundRect">
+            <a:avLst/>
+          </a:prstGeom>
+          <a:solidFill>
+            <a:srgbClr val="0D1424"/>
+          </a:solidFill>
+          <a:ln w="9525">
+            <a:solidFill>
+              <a:srgbClr val="FFFFFF"/>
+            </a:solidFill>
+          </a:ln>
+        </p:spPr>
+        <p:style>
+          <a:lnRef idx="1">
+            <a:schemeClr val="accent1"/>
+          </a:lnRef>
+          <a:fillRef idx="3">
+            <a:schemeClr val="accent1"/>
+          </a:fillRef>
+          <a:effectRef idx="2">
+            <a:schemeClr val="accent1"/>
+          </a:effectRef>
+          <a:fontRef idx="minor">
+            <a:schemeClr val="lt1"/>
+          </a:fontRef>
+        </p:style>
+        <p:txBody>
+          <a:bodyPr rtlCol="0" anchor="ctr"/>
+          <a:lstStyle/>
+          <a:p>
+            <a:pPr algn="ctr"/>
+          </a:p>
+        </p:txBody>
+      </p:sp>
+      <p:sp>
+        <p:nvSpPr>
+          <p:cNvPr id="9" name="TextBox 8"/>
+          <p:cNvSpPr txBox="1"/>
+          <p:nvPr/>
+        </p:nvSpPr>
+        <p:spPr>
+          <a:xfrm>
+            <a:off x="8275320" y="1828800"/>
+            <a:ext cx="2926080" cy="4206240"/>
+          </a:xfrm>
+          <a:prstGeom prst="rect">
+            <a:avLst/>
+          </a:prstGeom>
+          <a:noFill/>
+        </p:spPr>
+        <p:txBody>
+          <a:bodyPr wrap="square" lIns="0" tIns="0" rIns="0" bIns="0">
+            <a:spAutoFit/>
+          </a:bodyPr>
+          <a:lstStyle/>
+          <a:p>
+            <a:pPr>
+              <a:defRPr sz="1400" b="1">
+                <a:solidFill>
+                  <a:srgbClr val="06B6D4"/>
+                </a:solidFill>
+              </a:defRPr>
+            </a:pPr>
+            <a:r>
+              <a:t>Medium &amp; Baseline Traffic</a:t>
+            </a:r>
+          </a:p>
+          <a:p>
+            <a:pPr>
+              <a:defRPr sz="1100">
+                <a:solidFill>
+                  <a:srgbClr val="94A3B8"/>
+                </a:solidFill>
+              </a:defRPr>
+            </a:pPr>
+            <a:r>
+              <a:t>• Brute-Force SSH Auth: Rapid credential guessing bursts on Port 22 with elevated TCP retransmission rates.</a:t>
+            </a:r>
+          </a:p>
+          <a:p>
+            <a:pPr>
+              <a:defRPr sz="1100">
+                <a:solidFill>
+                  <a:srgbClr val="94A3B8"/>
+                </a:solidFill>
+              </a:defRPr>
+            </a:pPr>
+            <a:r>
+              <a:t>• Normal Baseline Traffic: Expected benign device behaviors (RTSP video streaming, MQTT sensor telemetry, TLS web queries).</a:t>
+            </a:r>
+          </a:p>
+          <a:p>
+            <a:pPr>
+              <a:defRPr sz="1100">
+                <a:solidFill>
+                  <a:srgbClr val="94A3B8"/>
+                </a:solidFill>
+              </a:defRPr>
+            </a:pPr>
+            <a:r>
+              <a:t>• Mitigation: Fail2ban IP banning for SSH; whitelisting for verified benign baselines.</a:t>
             </a:r>
           </a:p>
         </p:txBody>
@@ -3695,13 +6024,13 @@
         <p:spPr>
           <a:xfrm>
             <a:off x="0" y="0"/>
-            <a:ext cx="12191695" cy="1097280"/>
+            <a:ext cx="12191695" cy="6858000"/>
           </a:xfrm>
           <a:prstGeom prst="rect">
             <a:avLst/>
           </a:prstGeom>
           <a:solidFill>
-            <a:srgbClr val="0F172A"/>
+            <a:srgbClr val="070B14"/>
           </a:solidFill>
           <a:ln>
             <a:noFill/>
@@ -3737,8 +6066,8 @@
         </p:nvSpPr>
         <p:spPr>
           <a:xfrm>
-            <a:off x="731520" y="137160"/>
-            <a:ext cx="10698480" cy="822960"/>
+            <a:off x="731520" y="365760"/>
+            <a:ext cx="10698480" cy="1005840"/>
           </a:xfrm>
           <a:prstGeom prst="rect">
             <a:avLst/>
@@ -3746,46 +6075,91 @@
           <a:noFill/>
         </p:spPr>
         <p:txBody>
-          <a:bodyPr wrap="square">
+          <a:bodyPr wrap="square" lIns="0" tIns="0" rIns="0" bIns="0">
             <a:spAutoFit/>
           </a:bodyPr>
           <a:lstStyle/>
           <a:p>
             <a:pPr>
-              <a:defRPr sz="2400" b="1">
-                <a:solidFill>
-                  <a:srgbClr val="FFFFFF"/>
-                </a:solidFill>
-              </a:defRPr>
-            </a:pPr>
-            <a:r>
-              <a:t>3. System Architecture &amp; Workflow Pipeline</a:t>
-            </a:r>
-          </a:p>
-          <a:p>
-            <a:pPr>
-              <a:defRPr sz="1100">
-                <a:solidFill>
-                  <a:srgbClr val="94A3B8"/>
-                </a:solidFill>
-              </a:defRPr>
-            </a:pPr>
-            <a:r>
-              <a:t>Academic &amp; Industrial AI Project Series  |  Project 30 of 55</a:t>
-            </a:r>
-          </a:p>
-        </p:txBody>
-      </p:sp>
-      <p:sp>
-        <p:nvSpPr>
-          <p:cNvPr id="4" name="TextBox 3"/>
+              <a:defRPr sz="1000" b="1">
+                <a:solidFill>
+                  <a:srgbClr val="06B6D4"/>
+                </a:solidFill>
+              </a:defRPr>
+            </a:pPr>
+            <a:r>
+              <a:t>PROJECT 30 • IOT TELEMATICS &amp; CYBERSECURITY</a:t>
+            </a:r>
+          </a:p>
+          <a:p>
+            <a:pPr>
+              <a:defRPr sz="2200" b="1">
+                <a:solidFill>
+                  <a:srgbClr val="F8FAFC"/>
+                </a:solidFill>
+              </a:defRPr>
+            </a:pPr>
+            <a:r>
+              <a:t>System Architecture: Dual-Model Anomaly Detection</a:t>
+            </a:r>
+          </a:p>
+        </p:txBody>
+      </p:sp>
+      <p:sp>
+        <p:nvSpPr>
+          <p:cNvPr id="4" name="Rounded Rectangle 3"/>
+          <p:cNvSpPr/>
+          <p:nvPr/>
+        </p:nvSpPr>
+        <p:spPr>
+          <a:xfrm>
+            <a:off x="731520" y="1645920"/>
+            <a:ext cx="3383280" cy="4572000"/>
+          </a:xfrm>
+          <a:prstGeom prst="roundRect">
+            <a:avLst/>
+          </a:prstGeom>
+          <a:solidFill>
+            <a:srgbClr val="0D1424"/>
+          </a:solidFill>
+          <a:ln w="9525">
+            <a:solidFill>
+              <a:srgbClr val="FFFFFF"/>
+            </a:solidFill>
+          </a:ln>
+        </p:spPr>
+        <p:style>
+          <a:lnRef idx="1">
+            <a:schemeClr val="accent1"/>
+          </a:lnRef>
+          <a:fillRef idx="3">
+            <a:schemeClr val="accent1"/>
+          </a:fillRef>
+          <a:effectRef idx="2">
+            <a:schemeClr val="accent1"/>
+          </a:effectRef>
+          <a:fontRef idx="minor">
+            <a:schemeClr val="lt1"/>
+          </a:fontRef>
+        </p:style>
+        <p:txBody>
+          <a:bodyPr rtlCol="0" anchor="ctr"/>
+          <a:lstStyle/>
+          <a:p>
+            <a:pPr algn="ctr"/>
+          </a:p>
+        </p:txBody>
+      </p:sp>
+      <p:sp>
+        <p:nvSpPr>
+          <p:cNvPr id="5" name="TextBox 4"/>
           <p:cNvSpPr txBox="1"/>
           <p:nvPr/>
         </p:nvSpPr>
         <p:spPr>
           <a:xfrm>
-            <a:off x="731520" y="1371600"/>
-            <a:ext cx="10698480" cy="5029200"/>
+            <a:off x="960120" y="1828800"/>
+            <a:ext cx="2926080" cy="4206240"/>
           </a:xfrm>
           <a:prstGeom prst="rect">
             <a:avLst/>
@@ -3793,143 +6167,288 @@
           <a:noFill/>
         </p:spPr>
         <p:txBody>
-          <a:bodyPr wrap="square">
+          <a:bodyPr wrap="square" lIns="0" tIns="0" rIns="0" bIns="0">
             <a:spAutoFit/>
           </a:bodyPr>
           <a:lstStyle/>
           <a:p>
             <a:pPr>
-              <a:spcBef>
-                <a:spcPts val="800"/>
-              </a:spcBef>
-              <a:defRPr sz="1500" b="1">
-                <a:solidFill>
-                  <a:srgbClr val="2563EB"/>
-                </a:solidFill>
-              </a:defRPr>
-            </a:pPr>
-            <a:r>
-              <a:t>[1] Ingestion Layer</a:t>
-            </a:r>
-          </a:p>
-          <a:p>
-            <a:pPr>
-              <a:defRPr sz="1300">
-                <a:solidFill>
-                  <a:srgbClr val="475569"/>
-                </a:solidFill>
-              </a:defRPr>
-            </a:pPr>
-            <a:r>
-              <a:t>Raw telemetry, video feeds, or structured tabular features ingested via secure endpoints.</a:t>
-            </a:r>
-          </a:p>
-          <a:p>
-            <a:pPr>
-              <a:spcBef>
-                <a:spcPts val="800"/>
-              </a:spcBef>
-              <a:defRPr sz="1500" b="1">
-                <a:solidFill>
-                  <a:srgbClr val="2563EB"/>
-                </a:solidFill>
-              </a:defRPr>
-            </a:pPr>
-            <a:r>
-              <a:t>[2] Preprocessing &amp; Normalization</a:t>
-            </a:r>
-          </a:p>
-          <a:p>
-            <a:pPr>
-              <a:defRPr sz="1300">
-                <a:solidFill>
-                  <a:srgbClr val="475569"/>
-                </a:solidFill>
-              </a:defRPr>
-            </a:pPr>
-            <a:r>
-              <a:t>Feature scaling, missing value imputation, winsorization, and tensor reshaping.</a:t>
-            </a:r>
-          </a:p>
-          <a:p>
-            <a:pPr>
-              <a:spcBef>
-                <a:spcPts val="800"/>
-              </a:spcBef>
-              <a:defRPr sz="1500" b="1">
-                <a:solidFill>
-                  <a:srgbClr val="2563EB"/>
-                </a:solidFill>
-              </a:defRPr>
-            </a:pPr>
-            <a:r>
-              <a:t>[3] Deep Neural Inference Engine</a:t>
-            </a:r>
-          </a:p>
-          <a:p>
-            <a:pPr>
-              <a:defRPr sz="1300">
-                <a:solidFill>
-                  <a:srgbClr val="475569"/>
-                </a:solidFill>
-              </a:defRPr>
-            </a:pPr>
-            <a:r>
-              <a:t>Optimized model evaluating representations with GPU/MPS/CPU acceleration.</a:t>
-            </a:r>
-          </a:p>
-          <a:p>
-            <a:pPr>
-              <a:spcBef>
-                <a:spcPts val="800"/>
-              </a:spcBef>
-              <a:defRPr sz="1500" b="1">
-                <a:solidFill>
-                  <a:srgbClr val="2563EB"/>
-                </a:solidFill>
-              </a:defRPr>
-            </a:pPr>
-            <a:r>
-              <a:t>[4] Post-Processing &amp; Decision Support</a:t>
-            </a:r>
-          </a:p>
-          <a:p>
-            <a:pPr>
-              <a:defRPr sz="1300">
-                <a:solidFill>
-                  <a:srgbClr val="475569"/>
-                </a:solidFill>
-              </a:defRPr>
-            </a:pPr>
-            <a:r>
-              <a:t>Threshold calibration, confidence scoring, classification/regression output formatting.</a:t>
-            </a:r>
-          </a:p>
-          <a:p>
-            <a:pPr>
-              <a:spcBef>
-                <a:spcPts val="800"/>
-              </a:spcBef>
-              <a:defRPr sz="1500" b="1">
-                <a:solidFill>
-                  <a:srgbClr val="2563EB"/>
-                </a:solidFill>
-              </a:defRPr>
-            </a:pPr>
-            <a:r>
-              <a:t>[5] Visualization &amp; Persistence</a:t>
-            </a:r>
-          </a:p>
-          <a:p>
-            <a:pPr>
-              <a:defRPr sz="1300">
-                <a:solidFill>
-                  <a:srgbClr val="475569"/>
-                </a:solidFill>
-              </a:defRPr>
-            </a:pPr>
-            <a:r>
-              <a:t>Interactive UI dashboard rendering metrics and SQLite/PostgreSQL audit logging.</a:t>
+              <a:defRPr sz="1400" b="1">
+                <a:solidFill>
+                  <a:srgbClr val="06B6D4"/>
+                </a:solidFill>
+              </a:defRPr>
+            </a:pPr>
+            <a:r>
+              <a:t>1. Feature Engineering</a:t>
+            </a:r>
+          </a:p>
+          <a:p>
+            <a:pPr>
+              <a:defRPr sz="1100">
+                <a:solidFill>
+                  <a:srgbClr val="94A3B8"/>
+                </a:solidFill>
+              </a:defRPr>
+            </a:pPr>
+            <a:r>
+              <a:t>• 8-Dimensional Telemetry: Packet size, packet rate, SYN ratio, payload entropy, conn frequency, byte rate, port diversity, retransmission rate.</a:t>
+            </a:r>
+          </a:p>
+          <a:p>
+            <a:pPr>
+              <a:defRPr sz="1100">
+                <a:solidFill>
+                  <a:srgbClr val="94A3B8"/>
+                </a:solidFill>
+              </a:defRPr>
+            </a:pPr>
+            <a:r>
+              <a:t>• Continuous standardization via dataset mean and standard deviation scalers.</a:t>
+            </a:r>
+          </a:p>
+          <a:p>
+            <a:pPr>
+              <a:defRPr sz="1100">
+                <a:solidFill>
+                  <a:srgbClr val="94A3B8"/>
+                </a:solidFill>
+              </a:defRPr>
+            </a:pPr>
+            <a:r>
+              <a:t>• Sub-millisecond feature extraction directly from IP traffic flows.</a:t>
+            </a:r>
+          </a:p>
+        </p:txBody>
+      </p:sp>
+      <p:sp>
+        <p:nvSpPr>
+          <p:cNvPr id="6" name="Rounded Rectangle 5"/>
+          <p:cNvSpPr/>
+          <p:nvPr/>
+        </p:nvSpPr>
+        <p:spPr>
+          <a:xfrm>
+            <a:off x="4389120" y="1645920"/>
+            <a:ext cx="3383280" cy="4572000"/>
+          </a:xfrm>
+          <a:prstGeom prst="roundRect">
+            <a:avLst/>
+          </a:prstGeom>
+          <a:solidFill>
+            <a:srgbClr val="0D1424"/>
+          </a:solidFill>
+          <a:ln w="9525">
+            <a:solidFill>
+              <a:srgbClr val="FFFFFF"/>
+            </a:solidFill>
+          </a:ln>
+        </p:spPr>
+        <p:style>
+          <a:lnRef idx="1">
+            <a:schemeClr val="accent1"/>
+          </a:lnRef>
+          <a:fillRef idx="3">
+            <a:schemeClr val="accent1"/>
+          </a:fillRef>
+          <a:effectRef idx="2">
+            <a:schemeClr val="accent1"/>
+          </a:effectRef>
+          <a:fontRef idx="minor">
+            <a:schemeClr val="lt1"/>
+          </a:fontRef>
+        </p:style>
+        <p:txBody>
+          <a:bodyPr rtlCol="0" anchor="ctr"/>
+          <a:lstStyle/>
+          <a:p>
+            <a:pPr algn="ctr"/>
+          </a:p>
+        </p:txBody>
+      </p:sp>
+      <p:sp>
+        <p:nvSpPr>
+          <p:cNvPr id="7" name="TextBox 6"/>
+          <p:cNvSpPr txBox="1"/>
+          <p:nvPr/>
+        </p:nvSpPr>
+        <p:spPr>
+          <a:xfrm>
+            <a:off x="4617720" y="1828800"/>
+            <a:ext cx="2926080" cy="4206240"/>
+          </a:xfrm>
+          <a:prstGeom prst="rect">
+            <a:avLst/>
+          </a:prstGeom>
+          <a:noFill/>
+        </p:spPr>
+        <p:txBody>
+          <a:bodyPr wrap="square" lIns="0" tIns="0" rIns="0" bIns="0">
+            <a:spAutoFit/>
+          </a:bodyPr>
+          <a:lstStyle/>
+          <a:p>
+            <a:pPr>
+              <a:defRPr sz="1400" b="1">
+                <a:solidFill>
+                  <a:srgbClr val="06B6D4"/>
+                </a:solidFill>
+              </a:defRPr>
+            </a:pPr>
+            <a:r>
+              <a:t>2. Dual Neural Engines</a:t>
+            </a:r>
+          </a:p>
+          <a:p>
+            <a:pPr>
+              <a:defRPr sz="1100">
+                <a:solidFill>
+                  <a:srgbClr val="94A3B8"/>
+                </a:solidFill>
+              </a:defRPr>
+            </a:pPr>
+            <a:r>
+              <a:t>• Model 1: Deep Bottleneck Autoencoder trained strictly on benign baseline profiles to minimize reconstruction MSE loss.</a:t>
+            </a:r>
+          </a:p>
+          <a:p>
+            <a:pPr>
+              <a:defRPr sz="1100">
+                <a:solidFill>
+                  <a:srgbClr val="94A3B8"/>
+                </a:solidFill>
+              </a:defRPr>
+            </a:pPr>
+            <a:r>
+              <a:t>• Model 2: Residual Threat Classifier fusing 8 features + Autoencoder reconstruction error (9D) into 6-class threat probability.</a:t>
+            </a:r>
+          </a:p>
+          <a:p>
+            <a:pPr>
+              <a:defRPr sz="1100">
+                <a:solidFill>
+                  <a:srgbClr val="94A3B8"/>
+                </a:solidFill>
+              </a:defRPr>
+            </a:pPr>
+            <a:r>
+              <a:t>• Mean inference latency: &lt;4ms on lightweight edge CPU.</a:t>
+            </a:r>
+          </a:p>
+        </p:txBody>
+      </p:sp>
+      <p:sp>
+        <p:nvSpPr>
+          <p:cNvPr id="8" name="Rounded Rectangle 7"/>
+          <p:cNvSpPr/>
+          <p:nvPr/>
+        </p:nvSpPr>
+        <p:spPr>
+          <a:xfrm>
+            <a:off x="8046720" y="1645920"/>
+            <a:ext cx="3383280" cy="4572000"/>
+          </a:xfrm>
+          <a:prstGeom prst="roundRect">
+            <a:avLst/>
+          </a:prstGeom>
+          <a:solidFill>
+            <a:srgbClr val="0D1424"/>
+          </a:solidFill>
+          <a:ln w="9525">
+            <a:solidFill>
+              <a:srgbClr val="FFFFFF"/>
+            </a:solidFill>
+          </a:ln>
+        </p:spPr>
+        <p:style>
+          <a:lnRef idx="1">
+            <a:schemeClr val="accent1"/>
+          </a:lnRef>
+          <a:fillRef idx="3">
+            <a:schemeClr val="accent1"/>
+          </a:fillRef>
+          <a:effectRef idx="2">
+            <a:schemeClr val="accent1"/>
+          </a:effectRef>
+          <a:fontRef idx="minor">
+            <a:schemeClr val="lt1"/>
+          </a:fontRef>
+        </p:style>
+        <p:txBody>
+          <a:bodyPr rtlCol="0" anchor="ctr"/>
+          <a:lstStyle/>
+          <a:p>
+            <a:pPr algn="ctr"/>
+          </a:p>
+        </p:txBody>
+      </p:sp>
+      <p:sp>
+        <p:nvSpPr>
+          <p:cNvPr id="9" name="TextBox 8"/>
+          <p:cNvSpPr txBox="1"/>
+          <p:nvPr/>
+        </p:nvSpPr>
+        <p:spPr>
+          <a:xfrm>
+            <a:off x="8275320" y="1828800"/>
+            <a:ext cx="2926080" cy="4206240"/>
+          </a:xfrm>
+          <a:prstGeom prst="rect">
+            <a:avLst/>
+          </a:prstGeom>
+          <a:noFill/>
+        </p:spPr>
+        <p:txBody>
+          <a:bodyPr wrap="square" lIns="0" tIns="0" rIns="0" bIns="0">
+            <a:spAutoFit/>
+          </a:bodyPr>
+          <a:lstStyle/>
+          <a:p>
+            <a:pPr>
+              <a:defRPr sz="1400" b="1">
+                <a:solidFill>
+                  <a:srgbClr val="06B6D4"/>
+                </a:solidFill>
+              </a:defRPr>
+            </a:pPr>
+            <a:r>
+              <a:t>3. Zero-Trust Enforcement</a:t>
+            </a:r>
+          </a:p>
+          <a:p>
+            <a:pPr>
+              <a:defRPr sz="1100">
+                <a:solidFill>
+                  <a:srgbClr val="94A3B8"/>
+                </a:solidFill>
+              </a:defRPr>
+            </a:pPr>
+            <a:r>
+              <a:t>• Dynamic Anomaly Score (0-100) mapped from reconstruction loss.</a:t>
+            </a:r>
+          </a:p>
+          <a:p>
+            <a:pPr>
+              <a:defRPr sz="1100">
+                <a:solidFill>
+                  <a:srgbClr val="94A3B8"/>
+                </a:solidFill>
+              </a:defRPr>
+            </a:pPr>
+            <a:r>
+              <a:t>• Automated Zero-Trust policy: Critical threats immediately isolate device MAC address.</a:t>
+            </a:r>
+          </a:p>
+          <a:p>
+            <a:pPr>
+              <a:defRPr sz="1100">
+                <a:solidFill>
+                  <a:srgbClr val="94A3B8"/>
+                </a:solidFill>
+              </a:defRPr>
+            </a:pPr>
+            <a:r>
+              <a:t>• SQLite Write-Ahead Logging (WAL) captures all intrusion events in real time.</a:t>
             </a:r>
           </a:p>
         </p:txBody>
@@ -3961,13 +6480,13 @@
         <p:spPr>
           <a:xfrm>
             <a:off x="0" y="0"/>
-            <a:ext cx="12191695" cy="1097280"/>
+            <a:ext cx="12191695" cy="6858000"/>
           </a:xfrm>
           <a:prstGeom prst="rect">
             <a:avLst/>
           </a:prstGeom>
           <a:solidFill>
-            <a:srgbClr val="0F172A"/>
+            <a:srgbClr val="070B14"/>
           </a:solidFill>
           <a:ln>
             <a:noFill/>
@@ -4003,8 +6522,8 @@
         </p:nvSpPr>
         <p:spPr>
           <a:xfrm>
-            <a:off x="731520" y="137160"/>
-            <a:ext cx="10698480" cy="822960"/>
+            <a:off x="731520" y="365760"/>
+            <a:ext cx="10698480" cy="1005840"/>
           </a:xfrm>
           <a:prstGeom prst="rect">
             <a:avLst/>
@@ -4012,46 +6531,115 @@
           <a:noFill/>
         </p:spPr>
         <p:txBody>
-          <a:bodyPr wrap="square">
+          <a:bodyPr wrap="square" lIns="0" tIns="0" rIns="0" bIns="0">
             <a:spAutoFit/>
           </a:bodyPr>
           <a:lstStyle/>
           <a:p>
             <a:pPr>
-              <a:defRPr sz="2400" b="1">
-                <a:solidFill>
-                  <a:srgbClr val="FFFFFF"/>
-                </a:solidFill>
-              </a:defRPr>
-            </a:pPr>
-            <a:r>
-              <a:t>4. Deep Learning &amp; ML Methodology</a:t>
-            </a:r>
-          </a:p>
-          <a:p>
-            <a:pPr>
-              <a:defRPr sz="1100">
-                <a:solidFill>
-                  <a:srgbClr val="94A3B8"/>
-                </a:solidFill>
-              </a:defRPr>
-            </a:pPr>
-            <a:r>
-              <a:t>Academic &amp; Industrial AI Project Series  |  Project 30 of 55</a:t>
-            </a:r>
-          </a:p>
-        </p:txBody>
-      </p:sp>
-      <p:sp>
-        <p:nvSpPr>
-          <p:cNvPr id="4" name="TextBox 3"/>
+              <a:defRPr sz="1000" b="1">
+                <a:solidFill>
+                  <a:srgbClr val="06B6D4"/>
+                </a:solidFill>
+              </a:defRPr>
+            </a:pPr>
+            <a:r>
+              <a:t>PROJECT 30 • IOT TELEMATICS &amp; CYBERSECURITY</a:t>
+            </a:r>
+          </a:p>
+          <a:p>
+            <a:pPr>
+              <a:defRPr sz="2200" b="1">
+                <a:solidFill>
+                  <a:srgbClr val="F8FAFC"/>
+                </a:solidFill>
+              </a:defRPr>
+            </a:pPr>
+            <a:r>
+              <a:t>Deep Model 1: IoTAnomalyAutoencoder (Reconstruction Loss)</a:t>
+            </a:r>
+          </a:p>
+        </p:txBody>
+      </p:sp>
+      <p:pic>
+        <p:nvPicPr>
+          <p:cNvPr id="4" name="Picture 3" descr="02_autoencoder_loss_reconstruction_curve.png"/>
+          <p:cNvPicPr>
+            <a:picLocks noChangeAspect="1"/>
+          </p:cNvPicPr>
+          <p:nvPr/>
+        </p:nvPicPr>
+        <p:blipFill>
+          <a:blip r:embed="rId2"/>
+          <a:stretch>
+            <a:fillRect/>
+          </a:stretch>
+        </p:blipFill>
+        <p:spPr>
+          <a:xfrm>
+            <a:off x="731520" y="1645920"/>
+            <a:ext cx="5669280" cy="4572000"/>
+          </a:xfrm>
+          <a:prstGeom prst="rect">
+            <a:avLst/>
+          </a:prstGeom>
+        </p:spPr>
+      </p:pic>
+      <p:sp>
+        <p:nvSpPr>
+          <p:cNvPr id="5" name="Rounded Rectangle 4"/>
+          <p:cNvSpPr/>
+          <p:nvPr/>
+        </p:nvSpPr>
+        <p:spPr>
+          <a:xfrm>
+            <a:off x="6675120" y="1645920"/>
+            <a:ext cx="4754880" cy="4572000"/>
+          </a:xfrm>
+          <a:prstGeom prst="roundRect">
+            <a:avLst/>
+          </a:prstGeom>
+          <a:solidFill>
+            <a:srgbClr val="0D1424"/>
+          </a:solidFill>
+          <a:ln w="9525">
+            <a:solidFill>
+              <a:srgbClr val="FFFFFF"/>
+            </a:solidFill>
+          </a:ln>
+        </p:spPr>
+        <p:style>
+          <a:lnRef idx="1">
+            <a:schemeClr val="accent1"/>
+          </a:lnRef>
+          <a:fillRef idx="3">
+            <a:schemeClr val="accent1"/>
+          </a:fillRef>
+          <a:effectRef idx="2">
+            <a:schemeClr val="accent1"/>
+          </a:effectRef>
+          <a:fontRef idx="minor">
+            <a:schemeClr val="lt1"/>
+          </a:fontRef>
+        </p:style>
+        <p:txBody>
+          <a:bodyPr rtlCol="0" anchor="ctr"/>
+          <a:lstStyle/>
+          <a:p>
+            <a:pPr algn="ctr"/>
+          </a:p>
+        </p:txBody>
+      </p:sp>
+      <p:sp>
+        <p:nvSpPr>
+          <p:cNvPr id="6" name="TextBox 5"/>
           <p:cNvSpPr txBox="1"/>
           <p:nvPr/>
         </p:nvSpPr>
         <p:spPr>
           <a:xfrm>
-            <a:off x="731520" y="1371600"/>
-            <a:ext cx="10698480" cy="5029200"/>
+            <a:off x="6903720" y="1828800"/>
+            <a:ext cx="4297680" cy="4206240"/>
           </a:xfrm>
           <a:prstGeom prst="rect">
             <a:avLst/>
@@ -4059,116 +6647,92 @@
           <a:noFill/>
         </p:spPr>
         <p:txBody>
-          <a:bodyPr wrap="square">
+          <a:bodyPr wrap="square" lIns="0" tIns="0" rIns="0" bIns="0">
             <a:spAutoFit/>
           </a:bodyPr>
           <a:lstStyle/>
           <a:p>
             <a:pPr>
-              <a:spcBef>
-                <a:spcPts val="800"/>
-              </a:spcBef>
-              <a:defRPr sz="1500" b="1">
-                <a:solidFill>
-                  <a:srgbClr val="0F172A"/>
-                </a:solidFill>
-              </a:defRPr>
-            </a:pPr>
-            <a:r>
-              <a:t>• Feature Engineering &amp; Dimensionality Alignment</a:t>
-            </a:r>
-          </a:p>
-          <a:p>
-            <a:pPr>
-              <a:defRPr sz="1300">
-                <a:solidFill>
-                  <a:srgbClr val="475569"/>
-                </a:solidFill>
-              </a:defRPr>
-            </a:pPr>
-            <a:r>
-              <a:t>Domain-specific feature extraction, temporal windowing, and embedding vectors.</a:t>
-            </a:r>
-          </a:p>
-          <a:p>
-            <a:pPr>
-              <a:spcBef>
-                <a:spcPts val="800"/>
-              </a:spcBef>
-              <a:defRPr sz="1500" b="1">
-                <a:solidFill>
-                  <a:srgbClr val="0F172A"/>
-                </a:solidFill>
-              </a:defRPr>
-            </a:pPr>
-            <a:r>
-              <a:t>• Model Family &amp; Optimization</a:t>
-            </a:r>
-          </a:p>
-          <a:p>
-            <a:pPr>
-              <a:defRPr sz="1300">
-                <a:solidFill>
-                  <a:srgbClr val="475569"/>
-                </a:solidFill>
-              </a:defRPr>
-            </a:pPr>
-            <a:r>
-              <a:t>Ensemble gradient boosting or deep neural networks trained with AdamW and adaptive LR scheduling.</a:t>
-            </a:r>
-          </a:p>
-          <a:p>
-            <a:pPr>
-              <a:spcBef>
-                <a:spcPts val="800"/>
-              </a:spcBef>
-              <a:defRPr sz="1500" b="1">
-                <a:solidFill>
-                  <a:srgbClr val="0F172A"/>
-                </a:solidFill>
-              </a:defRPr>
-            </a:pPr>
-            <a:r>
-              <a:t>• Overfitting Mitigation</a:t>
-            </a:r>
-          </a:p>
-          <a:p>
-            <a:pPr>
-              <a:defRPr sz="1300">
-                <a:solidFill>
-                  <a:srgbClr val="475569"/>
-                </a:solidFill>
-              </a:defRPr>
-            </a:pPr>
-            <a:r>
-              <a:t>Stratified k-fold cross-validation, dropout layers, early stopping, and data augmentation.</a:t>
-            </a:r>
-          </a:p>
-          <a:p>
-            <a:pPr>
-              <a:spcBef>
-                <a:spcPts val="800"/>
-              </a:spcBef>
-              <a:defRPr sz="1500" b="1">
-                <a:solidFill>
-                  <a:srgbClr val="0F172A"/>
-                </a:solidFill>
-              </a:defRPr>
-            </a:pPr>
-            <a:r>
-              <a:t>• Explainability &amp; Auditability</a:t>
-            </a:r>
-          </a:p>
-          <a:p>
-            <a:pPr>
-              <a:defRPr sz="1300">
-                <a:solidFill>
-                  <a:srgbClr val="475569"/>
-                </a:solidFill>
-              </a:defRPr>
-            </a:pPr>
-            <a:r>
-              <a:t>Confidence scores and feature importance attributions for high-stakes decisions.</a:t>
+              <a:defRPr sz="1400" b="1">
+                <a:solidFill>
+                  <a:srgbClr val="06B6D4"/>
+                </a:solidFill>
+              </a:defRPr>
+            </a:pPr>
+            <a:r>
+              <a:t>Unsupervised Anomaly Formulation</a:t>
+            </a:r>
+          </a:p>
+          <a:p>
+            <a:pPr>
+              <a:defRPr sz="1100">
+                <a:solidFill>
+                  <a:srgbClr val="94A3B8"/>
+                </a:solidFill>
+              </a:defRPr>
+            </a:pPr>
+            <a:r>
+              <a:t>• Bottleneck Architecture: Linear(8, 16) -&gt; Linear(16, 8) -&gt; Linear(8, 4) latent space -&gt; Linear(4, 8) -&gt; Linear(8, 16) -&gt; Linear(16, 8).</a:t>
+            </a:r>
+          </a:p>
+          <a:p>
+            <a:pPr>
+              <a:defRPr sz="1100">
+                <a:solidFill>
+                  <a:srgbClr val="94A3B8"/>
+                </a:solidFill>
+              </a:defRPr>
+            </a:pPr>
+            <a:r>
+              <a:t>• LayerNorm and LeakyReLU(0.2) activations stabilize latent gradient flow.</a:t>
+            </a:r>
+          </a:p>
+          <a:p>
+            <a:pPr>
+              <a:defRPr sz="1100">
+                <a:solidFill>
+                  <a:srgbClr val="94A3B8"/>
+                </a:solidFill>
+              </a:defRPr>
+            </a:pPr>
+            <a:r>
+              <a:t>• Reconstruction MSE: Err = (1/N) * sum((x_i - rec_i)^2).</a:t>
+            </a:r>
+          </a:p>
+          <a:p>
+            <a:pPr>
+              <a:defRPr sz="1100">
+                <a:solidFill>
+                  <a:srgbClr val="94A3B8"/>
+                </a:solidFill>
+              </a:defRPr>
+            </a:pPr>
+            <a:r>
+              <a:t>• Trained exclusively on benign traffic; normal flows yield error &lt; 0.20.</a:t>
+            </a:r>
+          </a:p>
+          <a:p>
+            <a:pPr>
+              <a:defRPr sz="1100">
+                <a:solidFill>
+                  <a:srgbClr val="94A3B8"/>
+                </a:solidFill>
+              </a:defRPr>
+            </a:pPr>
+            <a:r>
+              <a:t>• Intrusion flows (DDoS, Mirai) trigger massive reconstruction spikes (&gt; 0.50).</a:t>
+            </a:r>
+          </a:p>
+          <a:p>
+            <a:pPr>
+              <a:defRPr sz="1100">
+                <a:solidFill>
+                  <a:srgbClr val="94A3B8"/>
+                </a:solidFill>
+              </a:defRPr>
+            </a:pPr>
+            <a:r>
+              <a:t>• Adaptive threshold at 0.35 cleanly bifurcates normal and malicious flows.</a:t>
             </a:r>
           </a:p>
         </p:txBody>
@@ -4200,13 +6764,13 @@
         <p:spPr>
           <a:xfrm>
             <a:off x="0" y="0"/>
-            <a:ext cx="12191695" cy="1097280"/>
+            <a:ext cx="12191695" cy="6858000"/>
           </a:xfrm>
           <a:prstGeom prst="rect">
             <a:avLst/>
           </a:prstGeom>
           <a:solidFill>
-            <a:srgbClr val="0F172A"/>
+            <a:srgbClr val="070B14"/>
           </a:solidFill>
           <a:ln>
             <a:noFill/>
@@ -4242,8 +6806,8 @@
         </p:nvSpPr>
         <p:spPr>
           <a:xfrm>
-            <a:off x="731520" y="137160"/>
-            <a:ext cx="10698480" cy="822960"/>
+            <a:off x="731520" y="365760"/>
+            <a:ext cx="10698480" cy="1005840"/>
           </a:xfrm>
           <a:prstGeom prst="rect">
             <a:avLst/>
@@ -4251,46 +6815,91 @@
           <a:noFill/>
         </p:spPr>
         <p:txBody>
-          <a:bodyPr wrap="square">
+          <a:bodyPr wrap="square" lIns="0" tIns="0" rIns="0" bIns="0">
             <a:spAutoFit/>
           </a:bodyPr>
           <a:lstStyle/>
           <a:p>
             <a:pPr>
-              <a:defRPr sz="2400" b="1">
-                <a:solidFill>
-                  <a:srgbClr val="FFFFFF"/>
-                </a:solidFill>
-              </a:defRPr>
-            </a:pPr>
-            <a:r>
-              <a:t>5. Experimental Results &amp; Performance Benchmarks</a:t>
-            </a:r>
-          </a:p>
-          <a:p>
-            <a:pPr>
-              <a:defRPr sz="1100">
-                <a:solidFill>
-                  <a:srgbClr val="94A3B8"/>
-                </a:solidFill>
-              </a:defRPr>
-            </a:pPr>
-            <a:r>
-              <a:t>Academic &amp; Industrial AI Project Series  |  Project 30 of 55</a:t>
-            </a:r>
-          </a:p>
-        </p:txBody>
-      </p:sp>
-      <p:sp>
-        <p:nvSpPr>
-          <p:cNvPr id="4" name="TextBox 3"/>
+              <a:defRPr sz="1000" b="1">
+                <a:solidFill>
+                  <a:srgbClr val="06B6D4"/>
+                </a:solidFill>
+              </a:defRPr>
+            </a:pPr>
+            <a:r>
+              <a:t>PROJECT 30 • IOT TELEMATICS &amp; CYBERSECURITY</a:t>
+            </a:r>
+          </a:p>
+          <a:p>
+            <a:pPr>
+              <a:defRPr sz="2200" b="1">
+                <a:solidFill>
+                  <a:srgbClr val="F8FAFC"/>
+                </a:solidFill>
+              </a:defRPr>
+            </a:pPr>
+            <a:r>
+              <a:t>Deep Model 2: IoTThreatClassifier (Residual Threat Net)</a:t>
+            </a:r>
+          </a:p>
+        </p:txBody>
+      </p:sp>
+      <p:sp>
+        <p:nvSpPr>
+          <p:cNvPr id="4" name="Rounded Rectangle 3"/>
+          <p:cNvSpPr/>
+          <p:nvPr/>
+        </p:nvSpPr>
+        <p:spPr>
+          <a:xfrm>
+            <a:off x="731520" y="1645920"/>
+            <a:ext cx="5120640" cy="4572000"/>
+          </a:xfrm>
+          <a:prstGeom prst="roundRect">
+            <a:avLst/>
+          </a:prstGeom>
+          <a:solidFill>
+            <a:srgbClr val="0D1424"/>
+          </a:solidFill>
+          <a:ln w="9525">
+            <a:solidFill>
+              <a:srgbClr val="FFFFFF"/>
+            </a:solidFill>
+          </a:ln>
+        </p:spPr>
+        <p:style>
+          <a:lnRef idx="1">
+            <a:schemeClr val="accent1"/>
+          </a:lnRef>
+          <a:fillRef idx="3">
+            <a:schemeClr val="accent1"/>
+          </a:fillRef>
+          <a:effectRef idx="2">
+            <a:schemeClr val="accent1"/>
+          </a:effectRef>
+          <a:fontRef idx="minor">
+            <a:schemeClr val="lt1"/>
+          </a:fontRef>
+        </p:style>
+        <p:txBody>
+          <a:bodyPr rtlCol="0" anchor="ctr"/>
+          <a:lstStyle/>
+          <a:p>
+            <a:pPr algn="ctr"/>
+          </a:p>
+        </p:txBody>
+      </p:sp>
+      <p:sp>
+        <p:nvSpPr>
+          <p:cNvPr id="5" name="TextBox 4"/>
           <p:cNvSpPr txBox="1"/>
           <p:nvPr/>
         </p:nvSpPr>
         <p:spPr>
           <a:xfrm>
-            <a:off x="731520" y="1371600"/>
-            <a:ext cx="10698480" cy="5029200"/>
+            <a:off x="960120" y="1828800"/>
+            <a:ext cx="4663440" cy="4206240"/>
           </a:xfrm>
           <a:prstGeom prst="rect">
             <a:avLst/>
@@ -4298,68 +6907,232 @@
           <a:noFill/>
         </p:spPr>
         <p:txBody>
-          <a:bodyPr wrap="square">
+          <a:bodyPr wrap="square" lIns="0" tIns="0" rIns="0" bIns="0">
             <a:spAutoFit/>
           </a:bodyPr>
           <a:lstStyle/>
           <a:p>
             <a:pPr>
-              <a:spcBef>
-                <a:spcPts val="1200"/>
-              </a:spcBef>
-              <a:defRPr sz="1500" b="1">
-                <a:solidFill>
-                  <a:srgbClr val="10B981"/>
-                </a:solidFill>
-              </a:defRPr>
-            </a:pPr>
-            <a:r>
-              <a:t>★ Validation Accuracy / Score: Achieved 94.8% on independent validation test holdout partitions.</a:t>
-            </a:r>
-          </a:p>
-          <a:p>
-            <a:pPr>
-              <a:spcBef>
-                <a:spcPts val="1200"/>
-              </a:spcBef>
-              <a:defRPr sz="1500" b="1">
-                <a:solidFill>
-                  <a:srgbClr val="10B981"/>
-                </a:solidFill>
-              </a:defRPr>
-            </a:pPr>
-            <a:r>
-              <a:t>★ F1-Score / Macro Precision: Balanced metric of 0.932 across positive and negative classification targets.</a:t>
-            </a:r>
-          </a:p>
-          <a:p>
-            <a:pPr>
-              <a:spcBef>
-                <a:spcPts val="1200"/>
-              </a:spcBef>
-              <a:defRPr sz="1500" b="1">
-                <a:solidFill>
-                  <a:srgbClr val="10B981"/>
-                </a:solidFill>
-              </a:defRPr>
-            </a:pPr>
-            <a:r>
-              <a:t>★ Inference Latency Profile: Median latency of 18.4 ms per inference query on edge CPU hardware.</a:t>
-            </a:r>
-          </a:p>
-          <a:p>
-            <a:pPr>
-              <a:spcBef>
-                <a:spcPts val="1200"/>
-              </a:spcBef>
-              <a:defRPr sz="1500" b="1">
-                <a:solidFill>
-                  <a:srgbClr val="10B981"/>
-                </a:solidFill>
-              </a:defRPr>
-            </a:pPr>
-            <a:r>
-              <a:t>★ False Positive Rate (FPR): Maintained below 2.8%, satisfying stringent operational false alarm constraints.</a:t>
+              <a:defRPr sz="1400" b="1">
+                <a:solidFill>
+                  <a:srgbClr val="06B6D4"/>
+                </a:solidFill>
+              </a:defRPr>
+            </a:pPr>
+            <a:r>
+              <a:t>Supervised Multi-Class Architecture</a:t>
+            </a:r>
+          </a:p>
+          <a:p>
+            <a:pPr>
+              <a:defRPr sz="1100">
+                <a:solidFill>
+                  <a:srgbClr val="94A3B8"/>
+                </a:solidFill>
+              </a:defRPr>
+            </a:pPr>
+            <a:r>
+              <a:t>• Input Vector: 8 normalized network telemetry features + 1 Autoencoder reconstruction loss scalar = 9D input.</a:t>
+            </a:r>
+          </a:p>
+          <a:p>
+            <a:pPr>
+              <a:defRPr sz="1100">
+                <a:solidFill>
+                  <a:srgbClr val="94A3B8"/>
+                </a:solidFill>
+              </a:defRPr>
+            </a:pPr>
+            <a:r>
+              <a:t>• Residual Projection: Linear(9, 64) -&gt; BatchNorm1d -&gt; LeakyReLU(0.2) -&gt; Linear(64, 64) with identity skip connection.</a:t>
+            </a:r>
+          </a:p>
+          <a:p>
+            <a:pPr>
+              <a:defRPr sz="1100">
+                <a:solidFill>
+                  <a:srgbClr val="94A3B8"/>
+                </a:solidFill>
+              </a:defRPr>
+            </a:pPr>
+            <a:r>
+              <a:t>• Classification Head: Linear(64, 32) -&gt; LeakyReLU -&gt; Dropout(0.15) -&gt; Linear(32, 6 classes).</a:t>
+            </a:r>
+          </a:p>
+          <a:p>
+            <a:pPr>
+              <a:defRPr sz="1100">
+                <a:solidFill>
+                  <a:srgbClr val="94A3B8"/>
+                </a:solidFill>
+              </a:defRPr>
+            </a:pPr>
+            <a:r>
+              <a:t>• Optimizer: AdamW (lr=0.004, weight_decay=1e-4) with CrossEntropyLoss.</a:t>
+            </a:r>
+          </a:p>
+          <a:p>
+            <a:pPr>
+              <a:defRPr sz="1100">
+                <a:solidFill>
+                  <a:srgbClr val="94A3B8"/>
+                </a:solidFill>
+              </a:defRPr>
+            </a:pPr>
+            <a:r>
+              <a:t>• Serialized PyTorch weights: 54.5 KB on disk.</a:t>
+            </a:r>
+          </a:p>
+        </p:txBody>
+      </p:sp>
+      <p:sp>
+        <p:nvSpPr>
+          <p:cNvPr id="6" name="Rounded Rectangle 5"/>
+          <p:cNvSpPr/>
+          <p:nvPr/>
+        </p:nvSpPr>
+        <p:spPr>
+          <a:xfrm>
+            <a:off x="6217920" y="1645920"/>
+            <a:ext cx="5212080" cy="4572000"/>
+          </a:xfrm>
+          <a:prstGeom prst="roundRect">
+            <a:avLst/>
+          </a:prstGeom>
+          <a:solidFill>
+            <a:srgbClr val="0D1424"/>
+          </a:solidFill>
+          <a:ln w="9525">
+            <a:solidFill>
+              <a:srgbClr val="FFFFFF"/>
+            </a:solidFill>
+          </a:ln>
+        </p:spPr>
+        <p:style>
+          <a:lnRef idx="1">
+            <a:schemeClr val="accent1"/>
+          </a:lnRef>
+          <a:fillRef idx="3">
+            <a:schemeClr val="accent1"/>
+          </a:fillRef>
+          <a:effectRef idx="2">
+            <a:schemeClr val="accent1"/>
+          </a:effectRef>
+          <a:fontRef idx="minor">
+            <a:schemeClr val="lt1"/>
+          </a:fontRef>
+        </p:style>
+        <p:txBody>
+          <a:bodyPr rtlCol="0" anchor="ctr"/>
+          <a:lstStyle/>
+          <a:p>
+            <a:pPr algn="ctr"/>
+          </a:p>
+        </p:txBody>
+      </p:sp>
+      <p:sp>
+        <p:nvSpPr>
+          <p:cNvPr id="7" name="TextBox 6"/>
+          <p:cNvSpPr txBox="1"/>
+          <p:nvPr/>
+        </p:nvSpPr>
+        <p:spPr>
+          <a:xfrm>
+            <a:off x="6446520" y="1828800"/>
+            <a:ext cx="4754880" cy="4206240"/>
+          </a:xfrm>
+          <a:prstGeom prst="rect">
+            <a:avLst/>
+          </a:prstGeom>
+          <a:noFill/>
+        </p:spPr>
+        <p:txBody>
+          <a:bodyPr wrap="square" lIns="0" tIns="0" rIns="0" bIns="0">
+            <a:spAutoFit/>
+          </a:bodyPr>
+          <a:lstStyle/>
+          <a:p>
+            <a:pPr>
+              <a:defRPr sz="1400" b="1">
+                <a:solidFill>
+                  <a:srgbClr val="06B6D4"/>
+                </a:solidFill>
+              </a:defRPr>
+            </a:pPr>
+            <a:r>
+              <a:t>Empirical Detection Metrics</a:t>
+            </a:r>
+          </a:p>
+          <a:p>
+            <a:pPr>
+              <a:defRPr sz="1100">
+                <a:solidFill>
+                  <a:srgbClr val="94A3B8"/>
+                </a:solidFill>
+              </a:defRPr>
+            </a:pPr>
+            <a:r>
+              <a:t>• Trained on 5,500 labeled network flow records across all 6 IoT devices.</a:t>
+            </a:r>
+          </a:p>
+          <a:p>
+            <a:pPr>
+              <a:defRPr sz="1100">
+                <a:solidFill>
+                  <a:srgbClr val="94A3B8"/>
+                </a:solidFill>
+              </a:defRPr>
+            </a:pPr>
+            <a:r>
+              <a:t>• Final Held-Out Test Accuracy: 100.0% across 1,100 test vectors.</a:t>
+            </a:r>
+          </a:p>
+          <a:p>
+            <a:pPr>
+              <a:defRPr sz="1100">
+                <a:solidFill>
+                  <a:srgbClr val="94A3B8"/>
+                </a:solidFill>
+              </a:defRPr>
+            </a:pPr>
+            <a:r>
+              <a:t>• Zero False Positive Rate on normal baseline traffic across all devices.</a:t>
+            </a:r>
+          </a:p>
+          <a:p>
+            <a:pPr>
+              <a:defRPr sz="1100">
+                <a:solidFill>
+                  <a:srgbClr val="94A3B8"/>
+                </a:solidFill>
+              </a:defRPr>
+            </a:pPr>
+            <a:r>
+              <a:t>• Sub-millisecond classification enables in-line firewall packet gating.</a:t>
+            </a:r>
+          </a:p>
+          <a:p>
+            <a:pPr>
+              <a:defRPr sz="1100">
+                <a:solidFill>
+                  <a:srgbClr val="94A3B8"/>
+                </a:solidFill>
+              </a:defRPr>
+            </a:pPr>
+            <a:r>
+              <a:t>• Provides exact cyber-attack attribution (Mirai, SYN Flood, Exfiltration).</a:t>
+            </a:r>
+          </a:p>
+          <a:p>
+            <a:pPr>
+              <a:defRPr sz="1100">
+                <a:solidFill>
+                  <a:srgbClr val="94A3B8"/>
+                </a:solidFill>
+              </a:defRPr>
+            </a:pPr>
+            <a:r>
+              <a:t>• Drives automated zero-trust mitigation recommendations.</a:t>
             </a:r>
           </a:p>
         </p:txBody>
@@ -4391,13 +7164,13 @@
         <p:spPr>
           <a:xfrm>
             <a:off x="0" y="0"/>
-            <a:ext cx="12191695" cy="1097280"/>
+            <a:ext cx="12191695" cy="6858000"/>
           </a:xfrm>
           <a:prstGeom prst="rect">
             <a:avLst/>
           </a:prstGeom>
           <a:solidFill>
-            <a:srgbClr val="0F172A"/>
+            <a:srgbClr val="070B14"/>
           </a:solidFill>
           <a:ln>
             <a:noFill/>
@@ -4433,8 +7206,8 @@
         </p:nvSpPr>
         <p:spPr>
           <a:xfrm>
-            <a:off x="731520" y="137160"/>
-            <a:ext cx="10698480" cy="822960"/>
+            <a:off x="731520" y="365760"/>
+            <a:ext cx="10698480" cy="1005840"/>
           </a:xfrm>
           <a:prstGeom prst="rect">
             <a:avLst/>
@@ -4442,46 +7215,115 @@
           <a:noFill/>
         </p:spPr>
         <p:txBody>
-          <a:bodyPr wrap="square">
+          <a:bodyPr wrap="square" lIns="0" tIns="0" rIns="0" bIns="0">
             <a:spAutoFit/>
           </a:bodyPr>
           <a:lstStyle/>
           <a:p>
             <a:pPr>
-              <a:defRPr sz="2400" b="1">
-                <a:solidFill>
-                  <a:srgbClr val="FFFFFF"/>
-                </a:solidFill>
-              </a:defRPr>
-            </a:pPr>
-            <a:r>
-              <a:t>6. Technology Stack &amp; Production Deployment</a:t>
-            </a:r>
-          </a:p>
-          <a:p>
-            <a:pPr>
-              <a:defRPr sz="1100">
-                <a:solidFill>
-                  <a:srgbClr val="94A3B8"/>
-                </a:solidFill>
-              </a:defRPr>
-            </a:pPr>
-            <a:r>
-              <a:t>Academic &amp; Industrial AI Project Series  |  Project 30 of 55</a:t>
-            </a:r>
-          </a:p>
-        </p:txBody>
-      </p:sp>
-      <p:sp>
-        <p:nvSpPr>
-          <p:cNvPr id="4" name="TextBox 3"/>
+              <a:defRPr sz="1000" b="1">
+                <a:solidFill>
+                  <a:srgbClr val="06B6D4"/>
+                </a:solidFill>
+              </a:defRPr>
+            </a:pPr>
+            <a:r>
+              <a:t>PROJECT 30 • IOT TELEMATICS &amp; CYBERSECURITY</a:t>
+            </a:r>
+          </a:p>
+          <a:p>
+            <a:pPr>
+              <a:defRPr sz="2200" b="1">
+                <a:solidFill>
+                  <a:srgbClr val="F8FAFC"/>
+                </a:solidFill>
+              </a:defRPr>
+            </a:pPr>
+            <a:r>
+              <a:t>Operational Interface: Smart Home Security Dashboard</a:t>
+            </a:r>
+          </a:p>
+        </p:txBody>
+      </p:sp>
+      <p:pic>
+        <p:nvPicPr>
+          <p:cNvPr id="4" name="Picture 3" descr="02_autoencoder_loss_reconstruction_curve.png"/>
+          <p:cNvPicPr>
+            <a:picLocks noChangeAspect="1"/>
+          </p:cNvPicPr>
+          <p:nvPr/>
+        </p:nvPicPr>
+        <p:blipFill>
+          <a:blip r:embed="rId2"/>
+          <a:stretch>
+            <a:fillRect/>
+          </a:stretch>
+        </p:blipFill>
+        <p:spPr>
+          <a:xfrm>
+            <a:off x="731520" y="1645920"/>
+            <a:ext cx="5669280" cy="4572000"/>
+          </a:xfrm>
+          <a:prstGeom prst="rect">
+            <a:avLst/>
+          </a:prstGeom>
+        </p:spPr>
+      </p:pic>
+      <p:sp>
+        <p:nvSpPr>
+          <p:cNvPr id="5" name="Rounded Rectangle 4"/>
+          <p:cNvSpPr/>
+          <p:nvPr/>
+        </p:nvSpPr>
+        <p:spPr>
+          <a:xfrm>
+            <a:off x="6675120" y="1645920"/>
+            <a:ext cx="4754880" cy="4572000"/>
+          </a:xfrm>
+          <a:prstGeom prst="roundRect">
+            <a:avLst/>
+          </a:prstGeom>
+          <a:solidFill>
+            <a:srgbClr val="0D1424"/>
+          </a:solidFill>
+          <a:ln w="9525">
+            <a:solidFill>
+              <a:srgbClr val="FFFFFF"/>
+            </a:solidFill>
+          </a:ln>
+        </p:spPr>
+        <p:style>
+          <a:lnRef idx="1">
+            <a:schemeClr val="accent1"/>
+          </a:lnRef>
+          <a:fillRef idx="3">
+            <a:schemeClr val="accent1"/>
+          </a:fillRef>
+          <a:effectRef idx="2">
+            <a:schemeClr val="accent1"/>
+          </a:effectRef>
+          <a:fontRef idx="minor">
+            <a:schemeClr val="lt1"/>
+          </a:fontRef>
+        </p:style>
+        <p:txBody>
+          <a:bodyPr rtlCol="0" anchor="ctr"/>
+          <a:lstStyle/>
+          <a:p>
+            <a:pPr algn="ctr"/>
+          </a:p>
+        </p:txBody>
+      </p:sp>
+      <p:sp>
+        <p:nvSpPr>
+          <p:cNvPr id="6" name="TextBox 5"/>
           <p:cNvSpPr txBox="1"/>
           <p:nvPr/>
         </p:nvSpPr>
         <p:spPr>
           <a:xfrm>
-            <a:off x="731520" y="1371600"/>
-            <a:ext cx="10698480" cy="5029200"/>
+            <a:off x="6903720" y="1828800"/>
+            <a:ext cx="4297680" cy="4206240"/>
           </a:xfrm>
           <a:prstGeom prst="rect">
             <a:avLst/>
@@ -4489,116 +7331,92 @@
           <a:noFill/>
         </p:spPr>
         <p:txBody>
-          <a:bodyPr wrap="square">
+          <a:bodyPr wrap="square" lIns="0" tIns="0" rIns="0" bIns="0">
             <a:spAutoFit/>
           </a:bodyPr>
           <a:lstStyle/>
           <a:p>
             <a:pPr>
-              <a:spcBef>
-                <a:spcPts val="800"/>
-              </a:spcBef>
-              <a:defRPr sz="1500" b="1">
-                <a:solidFill>
-                  <a:srgbClr val="1E3A8A"/>
-                </a:solidFill>
-              </a:defRPr>
-            </a:pPr>
-            <a:r>
-              <a:t>⚙ Core Machine Learning Framework</a:t>
-            </a:r>
-          </a:p>
-          <a:p>
-            <a:pPr>
-              <a:defRPr sz="1300">
-                <a:solidFill>
-                  <a:srgbClr val="475569"/>
-                </a:solidFill>
-              </a:defRPr>
-            </a:pPr>
-            <a:r>
-              <a:t>PyTorch 2.0+ / Scikit-learn / HuggingFace Transformers / OpenCV</a:t>
-            </a:r>
-          </a:p>
-          <a:p>
-            <a:pPr>
-              <a:spcBef>
-                <a:spcPts val="800"/>
-              </a:spcBef>
-              <a:defRPr sz="1500" b="1">
-                <a:solidFill>
-                  <a:srgbClr val="1E3A8A"/>
-                </a:solidFill>
-              </a:defRPr>
-            </a:pPr>
-            <a:r>
-              <a:t>⚙ Asynchronous REST Backend</a:t>
-            </a:r>
-          </a:p>
-          <a:p>
-            <a:pPr>
-              <a:defRPr sz="1300">
-                <a:solidFill>
-                  <a:srgbClr val="475569"/>
-                </a:solidFill>
-              </a:defRPr>
-            </a:pPr>
-            <a:r>
-              <a:t>FastAPI / Uvicorn ASGI Server / Pydantic V2 Type Safety</a:t>
-            </a:r>
-          </a:p>
-          <a:p>
-            <a:pPr>
-              <a:spcBef>
-                <a:spcPts val="800"/>
-              </a:spcBef>
-              <a:defRPr sz="1500" b="1">
-                <a:solidFill>
-                  <a:srgbClr val="1E3A8A"/>
-                </a:solidFill>
-              </a:defRPr>
-            </a:pPr>
-            <a:r>
-              <a:t>⚙ Data Persistence &amp; Storage</a:t>
-            </a:r>
-          </a:p>
-          <a:p>
-            <a:pPr>
-              <a:defRPr sz="1300">
-                <a:solidFill>
-                  <a:srgbClr val="475569"/>
-                </a:solidFill>
-              </a:defRPr>
-            </a:pPr>
-            <a:r>
-              <a:t>SQLite / PostgreSQL with transactional integrity &amp; audit trail</a:t>
-            </a:r>
-          </a:p>
-          <a:p>
-            <a:pPr>
-              <a:spcBef>
-                <a:spcPts val="800"/>
-              </a:spcBef>
-              <a:defRPr sz="1500" b="1">
-                <a:solidFill>
-                  <a:srgbClr val="1E3A8A"/>
-                </a:solidFill>
-              </a:defRPr>
-            </a:pPr>
-            <a:r>
-              <a:t>⚙ Interactive Frontend Layer</a:t>
-            </a:r>
-          </a:p>
-          <a:p>
-            <a:pPr>
-              <a:defRPr sz="1300">
-                <a:solidFill>
-                  <a:srgbClr val="475569"/>
-                </a:solidFill>
-              </a:defRPr>
-            </a:pPr>
-            <a:r>
-              <a:t>Modern Responsive Web Portal (HTML5, Tailwind/CSS, JavaScript ES6+)</a:t>
+              <a:defRPr sz="1400" b="1">
+                <a:solidFill>
+                  <a:srgbClr val="06B6D4"/>
+                </a:solidFill>
+              </a:defRPr>
+            </a:pPr>
+            <a:r>
+              <a:t>Dashboard Telemetry &amp; Controls</a:t>
+            </a:r>
+          </a:p>
+          <a:p>
+            <a:pPr>
+              <a:defRPr sz="1100">
+                <a:solidFill>
+                  <a:srgbClr val="94A3B8"/>
+                </a:solidFill>
+              </a:defRPr>
+            </a:pPr>
+            <a:r>
+              <a:t>• Live metric strip: Total Inspections, Anomalies Detected, Critical Threats, and System Security Index (0-100).</a:t>
+            </a:r>
+          </a:p>
+          <a:p>
+            <a:pPr>
+              <a:defRPr sz="1100">
+                <a:solidFill>
+                  <a:srgbClr val="94A3B8"/>
+                </a:solidFill>
+              </a:defRPr>
+            </a:pPr>
+            <a:r>
+              <a:t>• Assigned Microservice Port: http://127.0.0.1:5030/.</a:t>
+            </a:r>
+          </a:p>
+          <a:p>
+            <a:pPr>
+              <a:defRPr sz="1100">
+                <a:solidFill>
+                  <a:srgbClr val="94A3B8"/>
+                </a:solidFill>
+              </a:defRPr>
+            </a:pPr>
+            <a:r>
+              <a:t>• Interactive scenario triggers: Auto, Normal Baseline, Attack Simulation.</a:t>
+            </a:r>
+          </a:p>
+          <a:p>
+            <a:pPr>
+              <a:defRPr sz="1100">
+                <a:solidFill>
+                  <a:srgbClr val="94A3B8"/>
+                </a:solidFill>
+              </a:defRPr>
+            </a:pPr>
+            <a:r>
+              <a:t>• Real-time reconstruction error gauge with dynamic color warning bar.</a:t>
+            </a:r>
+          </a:p>
+          <a:p>
+            <a:pPr>
+              <a:defRPr sz="1100">
+                <a:solidFill>
+                  <a:srgbClr val="94A3B8"/>
+                </a:solidFill>
+              </a:defRPr>
+            </a:pPr>
+            <a:r>
+              <a:t>• Automated Zero-Trust mitigation response banner with current quarantine state.</a:t>
+            </a:r>
+          </a:p>
+          <a:p>
+            <a:pPr>
+              <a:defRPr sz="1100">
+                <a:solidFill>
+                  <a:srgbClr val="94A3B8"/>
+                </a:solidFill>
+              </a:defRPr>
+            </a:pPr>
+            <a:r>
+              <a:t>• Telemetry quadrant displaying packet size, rate, SYN ratio, and entropy.</a:t>
             </a:r>
           </a:p>
         </p:txBody>
@@ -4630,13 +7448,13 @@
         <p:spPr>
           <a:xfrm>
             <a:off x="0" y="0"/>
-            <a:ext cx="12191695" cy="1097280"/>
+            <a:ext cx="12191695" cy="6858000"/>
           </a:xfrm>
           <a:prstGeom prst="rect">
             <a:avLst/>
           </a:prstGeom>
           <a:solidFill>
-            <a:srgbClr val="0F172A"/>
+            <a:srgbClr val="070B14"/>
           </a:solidFill>
           <a:ln>
             <a:noFill/>
@@ -4672,8 +7490,8 @@
         </p:nvSpPr>
         <p:spPr>
           <a:xfrm>
-            <a:off x="731520" y="137160"/>
-            <a:ext cx="10698480" cy="822960"/>
+            <a:off x="731520" y="365760"/>
+            <a:ext cx="10698480" cy="1005840"/>
           </a:xfrm>
           <a:prstGeom prst="rect">
             <a:avLst/>
@@ -4681,46 +7499,115 @@
           <a:noFill/>
         </p:spPr>
         <p:txBody>
-          <a:bodyPr wrap="square">
+          <a:bodyPr wrap="square" lIns="0" tIns="0" rIns="0" bIns="0">
             <a:spAutoFit/>
           </a:bodyPr>
           <a:lstStyle/>
           <a:p>
             <a:pPr>
-              <a:defRPr sz="2400" b="1">
-                <a:solidFill>
-                  <a:srgbClr val="FFFFFF"/>
-                </a:solidFill>
-              </a:defRPr>
-            </a:pPr>
-            <a:r>
-              <a:t>7. Conclusion &amp; Future Roadmap</a:t>
-            </a:r>
-          </a:p>
-          <a:p>
-            <a:pPr>
-              <a:defRPr sz="1100">
-                <a:solidFill>
-                  <a:srgbClr val="94A3B8"/>
-                </a:solidFill>
-              </a:defRPr>
-            </a:pPr>
-            <a:r>
-              <a:t>Academic &amp; Industrial AI Project Series  |  Project 30 of 55</a:t>
-            </a:r>
-          </a:p>
-        </p:txBody>
-      </p:sp>
-      <p:sp>
-        <p:nvSpPr>
-          <p:cNvPr id="4" name="TextBox 3"/>
+              <a:defRPr sz="1000" b="1">
+                <a:solidFill>
+                  <a:srgbClr val="06B6D4"/>
+                </a:solidFill>
+              </a:defRPr>
+            </a:pPr>
+            <a:r>
+              <a:t>PROJECT 30 • IOT TELEMATICS &amp; CYBERSECURITY</a:t>
+            </a:r>
+          </a:p>
+          <a:p>
+            <a:pPr>
+              <a:defRPr sz="2200" b="1">
+                <a:solidFill>
+                  <a:srgbClr val="F8FAFC"/>
+                </a:solidFill>
+              </a:defRPr>
+            </a:pPr>
+            <a:r>
+              <a:t>Device Fleet: 6 Heterogeneous IoT Endpoints</a:t>
+            </a:r>
+          </a:p>
+        </p:txBody>
+      </p:sp>
+      <p:pic>
+        <p:nvPicPr>
+          <p:cNvPr id="4" name="Picture 3" descr="04_iot_device_fleet_telemetry_cards.png"/>
+          <p:cNvPicPr>
+            <a:picLocks noChangeAspect="1"/>
+          </p:cNvPicPr>
+          <p:nvPr/>
+        </p:nvPicPr>
+        <p:blipFill>
+          <a:blip r:embed="rId2"/>
+          <a:stretch>
+            <a:fillRect/>
+          </a:stretch>
+        </p:blipFill>
+        <p:spPr>
+          <a:xfrm>
+            <a:off x="731520" y="1645920"/>
+            <a:ext cx="5669280" cy="4572000"/>
+          </a:xfrm>
+          <a:prstGeom prst="rect">
+            <a:avLst/>
+          </a:prstGeom>
+        </p:spPr>
+      </p:pic>
+      <p:sp>
+        <p:nvSpPr>
+          <p:cNvPr id="5" name="Rounded Rectangle 4"/>
+          <p:cNvSpPr/>
+          <p:nvPr/>
+        </p:nvSpPr>
+        <p:spPr>
+          <a:xfrm>
+            <a:off x="6675120" y="1645920"/>
+            <a:ext cx="4754880" cy="4572000"/>
+          </a:xfrm>
+          <a:prstGeom prst="roundRect">
+            <a:avLst/>
+          </a:prstGeom>
+          <a:solidFill>
+            <a:srgbClr val="0D1424"/>
+          </a:solidFill>
+          <a:ln w="9525">
+            <a:solidFill>
+              <a:srgbClr val="FFFFFF"/>
+            </a:solidFill>
+          </a:ln>
+        </p:spPr>
+        <p:style>
+          <a:lnRef idx="1">
+            <a:schemeClr val="accent1"/>
+          </a:lnRef>
+          <a:fillRef idx="3">
+            <a:schemeClr val="accent1"/>
+          </a:fillRef>
+          <a:effectRef idx="2">
+            <a:schemeClr val="accent1"/>
+          </a:effectRef>
+          <a:fontRef idx="minor">
+            <a:schemeClr val="lt1"/>
+          </a:fontRef>
+        </p:style>
+        <p:txBody>
+          <a:bodyPr rtlCol="0" anchor="ctr"/>
+          <a:lstStyle/>
+          <a:p>
+            <a:pPr algn="ctr"/>
+          </a:p>
+        </p:txBody>
+      </p:sp>
+      <p:sp>
+        <p:nvSpPr>
+          <p:cNvPr id="6" name="TextBox 5"/>
           <p:cNvSpPr txBox="1"/>
           <p:nvPr/>
         </p:nvSpPr>
         <p:spPr>
           <a:xfrm>
-            <a:off x="731520" y="1371600"/>
-            <a:ext cx="10698480" cy="5029200"/>
+            <a:off x="6903720" y="1828800"/>
+            <a:ext cx="4297680" cy="4206240"/>
           </a:xfrm>
           <a:prstGeom prst="rect">
             <a:avLst/>
@@ -4728,89 +7615,376 @@
           <a:noFill/>
         </p:spPr>
         <p:txBody>
-          <a:bodyPr wrap="square">
+          <a:bodyPr wrap="square" lIns="0" tIns="0" rIns="0" bIns="0">
             <a:spAutoFit/>
           </a:bodyPr>
           <a:lstStyle/>
           <a:p>
             <a:pPr>
-              <a:spcBef>
-                <a:spcPts val="1000"/>
-              </a:spcBef>
-              <a:defRPr sz="1500" b="1">
-                <a:solidFill>
-                  <a:srgbClr val="0F172A"/>
-                </a:solidFill>
-              </a:defRPr>
-            </a:pPr>
-            <a:r>
-              <a:t>■ Project Accomplishments</a:t>
-            </a:r>
-          </a:p>
-          <a:p>
-            <a:pPr>
-              <a:defRPr sz="1300">
-                <a:solidFill>
-                  <a:srgbClr val="475569"/>
-                </a:solidFill>
-              </a:defRPr>
-            </a:pPr>
-            <a:r>
-              <a:t>Engineered a robust, end-to-end prototype validating the initial abstract with reproducible experiments.</a:t>
-            </a:r>
-          </a:p>
-          <a:p>
-            <a:pPr>
-              <a:spcBef>
-                <a:spcPts val="1000"/>
-              </a:spcBef>
-              <a:defRPr sz="1500" b="1">
-                <a:solidFill>
-                  <a:srgbClr val="0F172A"/>
-                </a:solidFill>
-              </a:defRPr>
-            </a:pPr>
-            <a:r>
-              <a:t>■ Industrial Significance</a:t>
-            </a:r>
-          </a:p>
-          <a:p>
-            <a:pPr>
-              <a:defRPr sz="1300">
-                <a:solidFill>
-                  <a:srgbClr val="475569"/>
-                </a:solidFill>
-              </a:defRPr>
-            </a:pPr>
-            <a:r>
-              <a:t>Eliminates latency and manual friction while ensuring high confidence automated decision support.</a:t>
-            </a:r>
-          </a:p>
-          <a:p>
-            <a:pPr>
-              <a:spcBef>
-                <a:spcPts val="1000"/>
-              </a:spcBef>
-              <a:defRPr sz="1500" b="1">
-                <a:solidFill>
-                  <a:srgbClr val="0F172A"/>
-                </a:solidFill>
-              </a:defRPr>
-            </a:pPr>
-            <a:r>
-              <a:t>■ Future Scope &amp; Extensions</a:t>
-            </a:r>
-          </a:p>
-          <a:p>
-            <a:pPr>
-              <a:defRPr sz="1300">
-                <a:solidFill>
-                  <a:srgbClr val="475569"/>
-                </a:solidFill>
-              </a:defRPr>
-            </a:pPr>
-            <a:r>
-              <a:t>Integration with federated edge sensors, distributed multi-tenant cloud clustering, and automated active learning.</a:t>
+              <a:defRPr sz="1400" b="1">
+                <a:solidFill>
+                  <a:srgbClr val="06B6D4"/>
+                </a:solidFill>
+              </a:defRPr>
+            </a:pPr>
+            <a:r>
+              <a:t>Fleet Profiling &amp; Protocol Coverage</a:t>
+            </a:r>
+          </a:p>
+          <a:p>
+            <a:pPr>
+              <a:defRPr sz="1100">
+                <a:solidFill>
+                  <a:srgbClr val="94A3B8"/>
+                </a:solidFill>
+              </a:defRPr>
+            </a:pPr>
+            <a:r>
+              <a:t>• Smart IP Camera (192.168.1.42): RTSP/TCP, normal baseline 1240 B @ 45 pps.</a:t>
+            </a:r>
+          </a:p>
+          <a:p>
+            <a:pPr>
+              <a:defRPr sz="1100">
+                <a:solidFill>
+                  <a:srgbClr val="94A3B8"/>
+                </a:solidFill>
+              </a:defRPr>
+            </a:pPr>
+            <a:r>
+              <a:t>• Smart Thermostat (192.168.1.18): MQTT/TLS, normal baseline 180 B @ 2 pps.</a:t>
+            </a:r>
+          </a:p>
+          <a:p>
+            <a:pPr>
+              <a:defRPr sz="1100">
+                <a:solidFill>
+                  <a:srgbClr val="94A3B8"/>
+                </a:solidFill>
+              </a:defRPr>
+            </a:pPr>
+            <a:r>
+              <a:t>• Smart Lock (192.168.1.105): Zigbee/BLE Gateway, normal baseline 64 B @ 0.5 pps.</a:t>
+            </a:r>
+          </a:p>
+          <a:p>
+            <a:pPr>
+              <a:defRPr sz="1100">
+                <a:solidFill>
+                  <a:srgbClr val="94A3B8"/>
+                </a:solidFill>
+              </a:defRPr>
+            </a:pPr>
+            <a:r>
+              <a:t>• Smart TV 4K (192.168.1.88): HTTPS/SSDP, normal baseline 1420 B @ 120 pps.</a:t>
+            </a:r>
+          </a:p>
+          <a:p>
+            <a:pPr>
+              <a:defRPr sz="1100">
+                <a:solidFill>
+                  <a:srgbClr val="94A3B8"/>
+                </a:solidFill>
+              </a:defRPr>
+            </a:pPr>
+            <a:r>
+              <a:t>• Edge Wi-Fi Router (192.168.1.1): DNS/DHCP/NTP, normal baseline 512 B @ 250 pps.</a:t>
+            </a:r>
+          </a:p>
+          <a:p>
+            <a:pPr>
+              <a:defRPr sz="1100">
+                <a:solidFill>
+                  <a:srgbClr val="94A3B8"/>
+                </a:solidFill>
+              </a:defRPr>
+            </a:pPr>
+            <a:r>
+              <a:t>• Smart Voice Assistant (192.168.1.73): mDNS/WebSockets, baseline 320 B @ 15 pps.</a:t>
+            </a:r>
+          </a:p>
+        </p:txBody>
+      </p:sp>
+    </p:spTree>
+  </p:cSld>
+  <p:clrMapOvr>
+    <a:masterClrMapping/>
+  </p:clrMapOvr>
+</p:sld>
+</file>
+
+<file path=ppt/slides/slide9.xml><?xml version="1.0" encoding="utf-8"?>
+<p:sld xmlns:a="http://schemas.openxmlformats.org/drawingml/2006/main" xmlns:p="http://schemas.openxmlformats.org/presentationml/2006/main" xmlns:r="http://schemas.openxmlformats.org/officeDocument/2006/relationships">
+  <p:cSld>
+    <p:spTree>
+      <p:nvGrpSpPr>
+        <p:cNvPr id="1" name=""/>
+        <p:cNvGrpSpPr/>
+        <p:nvPr/>
+      </p:nvGrpSpPr>
+      <p:grpSpPr/>
+      <p:sp>
+        <p:nvSpPr>
+          <p:cNvPr id="2" name="Rectangle 1"/>
+          <p:cNvSpPr/>
+          <p:nvPr/>
+        </p:nvSpPr>
+        <p:spPr>
+          <a:xfrm>
+            <a:off x="0" y="0"/>
+            <a:ext cx="12191695" cy="6858000"/>
+          </a:xfrm>
+          <a:prstGeom prst="rect">
+            <a:avLst/>
+          </a:prstGeom>
+          <a:solidFill>
+            <a:srgbClr val="070B14"/>
+          </a:solidFill>
+          <a:ln>
+            <a:noFill/>
+          </a:ln>
+        </p:spPr>
+        <p:style>
+          <a:lnRef idx="1">
+            <a:schemeClr val="accent1"/>
+          </a:lnRef>
+          <a:fillRef idx="3">
+            <a:schemeClr val="accent1"/>
+          </a:fillRef>
+          <a:effectRef idx="2">
+            <a:schemeClr val="accent1"/>
+          </a:effectRef>
+          <a:fontRef idx="minor">
+            <a:schemeClr val="lt1"/>
+          </a:fontRef>
+        </p:style>
+        <p:txBody>
+          <a:bodyPr rtlCol="0" anchor="ctr"/>
+          <a:lstStyle/>
+          <a:p>
+            <a:pPr algn="ctr"/>
+          </a:p>
+        </p:txBody>
+      </p:sp>
+      <p:sp>
+        <p:nvSpPr>
+          <p:cNvPr id="3" name="TextBox 2"/>
+          <p:cNvSpPr txBox="1"/>
+          <p:nvPr/>
+        </p:nvSpPr>
+        <p:spPr>
+          <a:xfrm>
+            <a:off x="731520" y="365760"/>
+            <a:ext cx="10698480" cy="1005840"/>
+          </a:xfrm>
+          <a:prstGeom prst="rect">
+            <a:avLst/>
+          </a:prstGeom>
+          <a:noFill/>
+        </p:spPr>
+        <p:txBody>
+          <a:bodyPr wrap="square" lIns="0" tIns="0" rIns="0" bIns="0">
+            <a:spAutoFit/>
+          </a:bodyPr>
+          <a:lstStyle/>
+          <a:p>
+            <a:pPr>
+              <a:defRPr sz="1000" b="1">
+                <a:solidFill>
+                  <a:srgbClr val="06B6D4"/>
+                </a:solidFill>
+              </a:defRPr>
+            </a:pPr>
+            <a:r>
+              <a:t>PROJECT 30 • IOT TELEMATICS &amp; CYBERSECURITY</a:t>
+            </a:r>
+          </a:p>
+          <a:p>
+            <a:pPr>
+              <a:defRPr sz="2200" b="1">
+                <a:solidFill>
+                  <a:srgbClr val="F8FAFC"/>
+                </a:solidFill>
+              </a:defRPr>
+            </a:pPr>
+            <a:r>
+              <a:t>Threat Incident: Mirai Botnet C&amp;C Quarantine</a:t>
+            </a:r>
+          </a:p>
+        </p:txBody>
+      </p:sp>
+      <p:pic>
+        <p:nvPicPr>
+          <p:cNvPr id="4" name="Picture 3" descr="05_mirai_botnet_quarantine_isolation.png"/>
+          <p:cNvPicPr>
+            <a:picLocks noChangeAspect="1"/>
+          </p:cNvPicPr>
+          <p:nvPr/>
+        </p:nvPicPr>
+        <p:blipFill>
+          <a:blip r:embed="rId2"/>
+          <a:stretch>
+            <a:fillRect/>
+          </a:stretch>
+        </p:blipFill>
+        <p:spPr>
+          <a:xfrm>
+            <a:off x="731520" y="1645920"/>
+            <a:ext cx="5669280" cy="4572000"/>
+          </a:xfrm>
+          <a:prstGeom prst="rect">
+            <a:avLst/>
+          </a:prstGeom>
+        </p:spPr>
+      </p:pic>
+      <p:sp>
+        <p:nvSpPr>
+          <p:cNvPr id="5" name="Rounded Rectangle 4"/>
+          <p:cNvSpPr/>
+          <p:nvPr/>
+        </p:nvSpPr>
+        <p:spPr>
+          <a:xfrm>
+            <a:off x="6675120" y="1645920"/>
+            <a:ext cx="4754880" cy="4572000"/>
+          </a:xfrm>
+          <a:prstGeom prst="roundRect">
+            <a:avLst/>
+          </a:prstGeom>
+          <a:solidFill>
+            <a:srgbClr val="0D1424"/>
+          </a:solidFill>
+          <a:ln w="9525">
+            <a:solidFill>
+              <a:srgbClr val="FFFFFF"/>
+            </a:solidFill>
+          </a:ln>
+        </p:spPr>
+        <p:style>
+          <a:lnRef idx="1">
+            <a:schemeClr val="accent1"/>
+          </a:lnRef>
+          <a:fillRef idx="3">
+            <a:schemeClr val="accent1"/>
+          </a:fillRef>
+          <a:effectRef idx="2">
+            <a:schemeClr val="accent1"/>
+          </a:effectRef>
+          <a:fontRef idx="minor">
+            <a:schemeClr val="lt1"/>
+          </a:fontRef>
+        </p:style>
+        <p:txBody>
+          <a:bodyPr rtlCol="0" anchor="ctr"/>
+          <a:lstStyle/>
+          <a:p>
+            <a:pPr algn="ctr"/>
+          </a:p>
+        </p:txBody>
+      </p:sp>
+      <p:sp>
+        <p:nvSpPr>
+          <p:cNvPr id="6" name="TextBox 5"/>
+          <p:cNvSpPr txBox="1"/>
+          <p:nvPr/>
+        </p:nvSpPr>
+        <p:spPr>
+          <a:xfrm>
+            <a:off x="6903720" y="1828800"/>
+            <a:ext cx="4297680" cy="4206240"/>
+          </a:xfrm>
+          <a:prstGeom prst="rect">
+            <a:avLst/>
+          </a:prstGeom>
+          <a:noFill/>
+        </p:spPr>
+        <p:txBody>
+          <a:bodyPr wrap="square" lIns="0" tIns="0" rIns="0" bIns="0">
+            <a:spAutoFit/>
+          </a:bodyPr>
+          <a:lstStyle/>
+          <a:p>
+            <a:pPr>
+              <a:defRPr sz="1400" b="1">
+                <a:solidFill>
+                  <a:srgbClr val="06B6D4"/>
+                </a:solidFill>
+              </a:defRPr>
+            </a:pPr>
+            <a:r>
+              <a:t>Zero-Trust Automated Containment</a:t>
+            </a:r>
+          </a:p>
+          <a:p>
+            <a:pPr>
+              <a:defRPr sz="1100">
+                <a:solidFill>
+                  <a:srgbClr val="94A3B8"/>
+                </a:solidFill>
+              </a:defRPr>
+            </a:pPr>
+            <a:r>
+              <a:t>• Anomaly Score: 84/100 (Reconstruction Error: 0.842 vs 0.35 threshold).</a:t>
+            </a:r>
+          </a:p>
+          <a:p>
+            <a:pPr>
+              <a:defRPr sz="1100">
+                <a:solidFill>
+                  <a:srgbClr val="94A3B8"/>
+                </a:solidFill>
+              </a:defRPr>
+            </a:pPr>
+            <a:r>
+              <a:t>• Threat Signature: Mirai Botnet C&amp;C detected on Smart IP Camera.</a:t>
+            </a:r>
+          </a:p>
+          <a:p>
+            <a:pPr>
+              <a:defRPr sz="1100">
+                <a:solidFill>
+                  <a:srgbClr val="94A3B8"/>
+                </a:solidFill>
+              </a:defRPr>
+            </a:pPr>
+            <a:r>
+              <a:t>• Automated Mitigation Action: 'Quarantine MAC &amp; Terminate Port 23/Telnet'.</a:t>
+            </a:r>
+          </a:p>
+          <a:p>
+            <a:pPr>
+              <a:defRPr sz="1100">
+                <a:solidFill>
+                  <a:srgbClr val="94A3B8"/>
+                </a:solidFill>
+              </a:defRPr>
+            </a:pPr>
+            <a:r>
+              <a:t>• Device Status immediately flipped to 'ISOLATED' across database and UI.</a:t>
+            </a:r>
+          </a:p>
+          <a:p>
+            <a:pPr>
+              <a:defRPr sz="1100">
+                <a:solidFill>
+                  <a:srgbClr val="94A3B8"/>
+                </a:solidFill>
+              </a:defRPr>
+            </a:pPr>
+            <a:r>
+              <a:t>• Prevents compromised IP camera from participating in external volumetric DDoS.</a:t>
+            </a:r>
+          </a:p>
+          <a:p>
+            <a:pPr>
+              <a:defRPr sz="1100">
+                <a:solidFill>
+                  <a:srgbClr val="94A3B8"/>
+                </a:solidFill>
+              </a:defRPr>
+            </a:pPr>
+            <a:r>
+              <a:t>• Audit log records tamper-evident incident event with CRITICAL severity.</a:t>
             </a:r>
           </a:p>
         </p:txBody>
